--- a/doc/ml-constant.pptx
+++ b/doc/ml-constant.pptx
@@ -271,6 +271,14 @@
 </p:presentation>
 </file>
 
+<file path=ppt/revisionInfo.xml><?xml version="1.0" encoding="utf-8"?>
+<p1510:revInfo xmlns:a="http://schemas.openxmlformats.org/drawingml/2006/main" xmlns:r="http://schemas.openxmlformats.org/officeDocument/2006/relationships" xmlns:p1510="http://schemas.microsoft.com/office/powerpoint/2015/10/main">
+  <p1510:revLst>
+    <p1510:client id="{07617DBD-06FC-4AB1-929F-5F6ABE19B9DC}" v="35" dt="2026-10-06T06:30:10.316"/>
+  </p1510:revLst>
+</p1510:revInfo>
+</file>
+
 <file path=ppt/changesInfos/changesInfo1.xml><?xml version="1.0" encoding="utf-8"?>
 <pc:chgInfo xmlns:a="http://schemas.openxmlformats.org/drawingml/2006/main" xmlns:r="http://schemas.openxmlformats.org/officeDocument/2006/relationships" xmlns:ac="http://schemas.microsoft.com/office/drawing/2013/main/command" xmlns:pc="http://schemas.microsoft.com/office/powerpoint/2013/main/command">
   <pc:docChgLst>
@@ -538,6 +546,518 @@
           <pc:docMk/>
           <pc:sldMk cId="976896503" sldId="293"/>
         </pc:sldMkLst>
+      </pc:sldChg>
+    </pc:docChg>
+  </pc:docChgLst>
+  <pc:docChgLst>
+    <pc:chgData name="Florian Kattner HMU Potsdam" userId="b781a7f8-b6b6-4bfe-b2a2-6a9fc406e1ad" providerId="ADAL" clId="{07617DBD-06FC-4AB1-929F-5F6ABE19B9DC}"/>
+    <pc:docChg chg="custSel modSld">
+      <pc:chgData name="Florian Kattner HMU Potsdam" userId="b781a7f8-b6b6-4bfe-b2a2-6a9fc406e1ad" providerId="ADAL" clId="{07617DBD-06FC-4AB1-929F-5F6ABE19B9DC}" dt="2026-10-06T06:30:10.316" v="52"/>
+      <pc:docMkLst>
+        <pc:docMk/>
+      </pc:docMkLst>
+      <pc:sldChg chg="addSp modSp">
+        <pc:chgData name="Florian Kattner HMU Potsdam" userId="b781a7f8-b6b6-4bfe-b2a2-6a9fc406e1ad" providerId="ADAL" clId="{07617DBD-06FC-4AB1-929F-5F6ABE19B9DC}" dt="2026-10-06T06:29:40.138" v="23"/>
+        <pc:sldMkLst>
+          <pc:docMk/>
+          <pc:sldMk cId="3734412021" sldId="258"/>
+        </pc:sldMkLst>
+        <pc:spChg chg="add mod">
+          <ac:chgData name="Florian Kattner HMU Potsdam" userId="b781a7f8-b6b6-4bfe-b2a2-6a9fc406e1ad" providerId="ADAL" clId="{07617DBD-06FC-4AB1-929F-5F6ABE19B9DC}" dt="2026-10-06T06:29:40.138" v="23"/>
+          <ac:spMkLst>
+            <pc:docMk/>
+            <pc:sldMk cId="3734412021" sldId="258"/>
+            <ac:spMk id="2" creationId="{E64E2035-CC71-BAD5-6632-CBF885D46989}"/>
+          </ac:spMkLst>
+        </pc:spChg>
+      </pc:sldChg>
+      <pc:sldChg chg="addSp delSp modSp mod">
+        <pc:chgData name="Florian Kattner HMU Potsdam" userId="b781a7f8-b6b6-4bfe-b2a2-6a9fc406e1ad" providerId="ADAL" clId="{07617DBD-06FC-4AB1-929F-5F6ABE19B9DC}" dt="2026-10-06T06:29:37.637" v="21"/>
+        <pc:sldMkLst>
+          <pc:docMk/>
+          <pc:sldMk cId="1841868252" sldId="259"/>
+        </pc:sldMkLst>
+        <pc:spChg chg="add del mod">
+          <ac:chgData name="Florian Kattner HMU Potsdam" userId="b781a7f8-b6b6-4bfe-b2a2-6a9fc406e1ad" providerId="ADAL" clId="{07617DBD-06FC-4AB1-929F-5F6ABE19B9DC}" dt="2026-10-06T06:29:37.271" v="20" actId="478"/>
+          <ac:spMkLst>
+            <pc:docMk/>
+            <pc:sldMk cId="1841868252" sldId="259"/>
+            <ac:spMk id="2" creationId="{56401330-08FD-D309-59B9-4D42D48813D1}"/>
+          </ac:spMkLst>
+        </pc:spChg>
+        <pc:spChg chg="add mod">
+          <ac:chgData name="Florian Kattner HMU Potsdam" userId="b781a7f8-b6b6-4bfe-b2a2-6a9fc406e1ad" providerId="ADAL" clId="{07617DBD-06FC-4AB1-929F-5F6ABE19B9DC}" dt="2026-10-06T06:29:37.637" v="21"/>
+          <ac:spMkLst>
+            <pc:docMk/>
+            <pc:sldMk cId="1841868252" sldId="259"/>
+            <ac:spMk id="3" creationId="{971B47C8-2426-FB44-F2F5-CDCF0ED93F41}"/>
+          </ac:spMkLst>
+        </pc:spChg>
+      </pc:sldChg>
+      <pc:sldChg chg="addSp modSp">
+        <pc:chgData name="Florian Kattner HMU Potsdam" userId="b781a7f8-b6b6-4bfe-b2a2-6a9fc406e1ad" providerId="ADAL" clId="{07617DBD-06FC-4AB1-929F-5F6ABE19B9DC}" dt="2026-10-06T06:29:42.333" v="25"/>
+        <pc:sldMkLst>
+          <pc:docMk/>
+          <pc:sldMk cId="935703201" sldId="260"/>
+        </pc:sldMkLst>
+        <pc:spChg chg="add mod">
+          <ac:chgData name="Florian Kattner HMU Potsdam" userId="b781a7f8-b6b6-4bfe-b2a2-6a9fc406e1ad" providerId="ADAL" clId="{07617DBD-06FC-4AB1-929F-5F6ABE19B9DC}" dt="2026-10-06T06:29:42.333" v="25"/>
+          <ac:spMkLst>
+            <pc:docMk/>
+            <pc:sldMk cId="935703201" sldId="260"/>
+            <ac:spMk id="2" creationId="{138C6C8D-8161-BCE3-C106-E6CB7C399484}"/>
+          </ac:spMkLst>
+        </pc:spChg>
+      </pc:sldChg>
+      <pc:sldChg chg="addSp modSp">
+        <pc:chgData name="Florian Kattner HMU Potsdam" userId="b781a7f8-b6b6-4bfe-b2a2-6a9fc406e1ad" providerId="ADAL" clId="{07617DBD-06FC-4AB1-929F-5F6ABE19B9DC}" dt="2026-10-06T06:29:30.425" v="19"/>
+        <pc:sldMkLst>
+          <pc:docMk/>
+          <pc:sldMk cId="2902259701" sldId="261"/>
+        </pc:sldMkLst>
+        <pc:spChg chg="add mod">
+          <ac:chgData name="Florian Kattner HMU Potsdam" userId="b781a7f8-b6b6-4bfe-b2a2-6a9fc406e1ad" providerId="ADAL" clId="{07617DBD-06FC-4AB1-929F-5F6ABE19B9DC}" dt="2026-10-06T06:29:30.425" v="19"/>
+          <ac:spMkLst>
+            <pc:docMk/>
+            <pc:sldMk cId="2902259701" sldId="261"/>
+            <ac:spMk id="2" creationId="{5C60B34D-790A-FEAD-D7D4-41E5E7FDD170}"/>
+          </ac:spMkLst>
+        </pc:spChg>
+      </pc:sldChg>
+      <pc:sldChg chg="addSp modSp">
+        <pc:chgData name="Florian Kattner HMU Potsdam" userId="b781a7f8-b6b6-4bfe-b2a2-6a9fc406e1ad" providerId="ADAL" clId="{07617DBD-06FC-4AB1-929F-5F6ABE19B9DC}" dt="2026-10-06T06:29:52.549" v="30"/>
+        <pc:sldMkLst>
+          <pc:docMk/>
+          <pc:sldMk cId="3063291070" sldId="262"/>
+        </pc:sldMkLst>
+        <pc:spChg chg="add mod">
+          <ac:chgData name="Florian Kattner HMU Potsdam" userId="b781a7f8-b6b6-4bfe-b2a2-6a9fc406e1ad" providerId="ADAL" clId="{07617DBD-06FC-4AB1-929F-5F6ABE19B9DC}" dt="2026-10-06T06:29:52.549" v="30"/>
+          <ac:spMkLst>
+            <pc:docMk/>
+            <pc:sldMk cId="3063291070" sldId="262"/>
+            <ac:spMk id="2" creationId="{D2296B83-4A5D-7A32-44FC-53CF132EB98B}"/>
+          </ac:spMkLst>
+        </pc:spChg>
+      </pc:sldChg>
+      <pc:sldChg chg="addSp modSp">
+        <pc:chgData name="Florian Kattner HMU Potsdam" userId="b781a7f8-b6b6-4bfe-b2a2-6a9fc406e1ad" providerId="ADAL" clId="{07617DBD-06FC-4AB1-929F-5F6ABE19B9DC}" dt="2026-10-06T06:29:39.257" v="22"/>
+        <pc:sldMkLst>
+          <pc:docMk/>
+          <pc:sldMk cId="3363516175" sldId="263"/>
+        </pc:sldMkLst>
+        <pc:spChg chg="add mod">
+          <ac:chgData name="Florian Kattner HMU Potsdam" userId="b781a7f8-b6b6-4bfe-b2a2-6a9fc406e1ad" providerId="ADAL" clId="{07617DBD-06FC-4AB1-929F-5F6ABE19B9DC}" dt="2026-10-06T06:29:39.257" v="22"/>
+          <ac:spMkLst>
+            <pc:docMk/>
+            <pc:sldMk cId="3363516175" sldId="263"/>
+            <ac:spMk id="2" creationId="{BAB68F37-54A3-D930-D3A0-08D615997685}"/>
+          </ac:spMkLst>
+        </pc:spChg>
+      </pc:sldChg>
+      <pc:sldChg chg="addSp modSp">
+        <pc:chgData name="Florian Kattner HMU Potsdam" userId="b781a7f8-b6b6-4bfe-b2a2-6a9fc406e1ad" providerId="ADAL" clId="{07617DBD-06FC-4AB1-929F-5F6ABE19B9DC}" dt="2026-10-06T06:29:40.965" v="24"/>
+        <pc:sldMkLst>
+          <pc:docMk/>
+          <pc:sldMk cId="217500498" sldId="264"/>
+        </pc:sldMkLst>
+        <pc:spChg chg="add mod">
+          <ac:chgData name="Florian Kattner HMU Potsdam" userId="b781a7f8-b6b6-4bfe-b2a2-6a9fc406e1ad" providerId="ADAL" clId="{07617DBD-06FC-4AB1-929F-5F6ABE19B9DC}" dt="2026-10-06T06:29:40.965" v="24"/>
+          <ac:spMkLst>
+            <pc:docMk/>
+            <pc:sldMk cId="217500498" sldId="264"/>
+            <ac:spMk id="2" creationId="{BE035081-F671-4527-DE48-B4CAF486FA88}"/>
+          </ac:spMkLst>
+        </pc:spChg>
+      </pc:sldChg>
+      <pc:sldChg chg="addSp modSp">
+        <pc:chgData name="Florian Kattner HMU Potsdam" userId="b781a7f8-b6b6-4bfe-b2a2-6a9fc406e1ad" providerId="ADAL" clId="{07617DBD-06FC-4AB1-929F-5F6ABE19B9DC}" dt="2026-10-06T06:29:43.147" v="26"/>
+        <pc:sldMkLst>
+          <pc:docMk/>
+          <pc:sldMk cId="3149514930" sldId="265"/>
+        </pc:sldMkLst>
+        <pc:spChg chg="add mod">
+          <ac:chgData name="Florian Kattner HMU Potsdam" userId="b781a7f8-b6b6-4bfe-b2a2-6a9fc406e1ad" providerId="ADAL" clId="{07617DBD-06FC-4AB1-929F-5F6ABE19B9DC}" dt="2026-10-06T06:29:43.147" v="26"/>
+          <ac:spMkLst>
+            <pc:docMk/>
+            <pc:sldMk cId="3149514930" sldId="265"/>
+            <ac:spMk id="2" creationId="{564E2ADB-0798-587F-2EC5-B407DC75B35A}"/>
+          </ac:spMkLst>
+        </pc:spChg>
+      </pc:sldChg>
+      <pc:sldChg chg="addSp modSp">
+        <pc:chgData name="Florian Kattner HMU Potsdam" userId="b781a7f8-b6b6-4bfe-b2a2-6a9fc406e1ad" providerId="ADAL" clId="{07617DBD-06FC-4AB1-929F-5F6ABE19B9DC}" dt="2026-10-06T06:29:43.968" v="27"/>
+        <pc:sldMkLst>
+          <pc:docMk/>
+          <pc:sldMk cId="2384650500" sldId="267"/>
+        </pc:sldMkLst>
+        <pc:spChg chg="add mod">
+          <ac:chgData name="Florian Kattner HMU Potsdam" userId="b781a7f8-b6b6-4bfe-b2a2-6a9fc406e1ad" providerId="ADAL" clId="{07617DBD-06FC-4AB1-929F-5F6ABE19B9DC}" dt="2026-10-06T06:29:43.968" v="27"/>
+          <ac:spMkLst>
+            <pc:docMk/>
+            <pc:sldMk cId="2384650500" sldId="267"/>
+            <ac:spMk id="2" creationId="{13637DB8-8FC1-7341-2205-C79414953FB2}"/>
+          </ac:spMkLst>
+        </pc:spChg>
+      </pc:sldChg>
+      <pc:sldChg chg="addSp modSp">
+        <pc:chgData name="Florian Kattner HMU Potsdam" userId="b781a7f8-b6b6-4bfe-b2a2-6a9fc406e1ad" providerId="ADAL" clId="{07617DBD-06FC-4AB1-929F-5F6ABE19B9DC}" dt="2026-10-06T06:29:44.812" v="28"/>
+        <pc:sldMkLst>
+          <pc:docMk/>
+          <pc:sldMk cId="171703210" sldId="269"/>
+        </pc:sldMkLst>
+        <pc:spChg chg="add mod">
+          <ac:chgData name="Florian Kattner HMU Potsdam" userId="b781a7f8-b6b6-4bfe-b2a2-6a9fc406e1ad" providerId="ADAL" clId="{07617DBD-06FC-4AB1-929F-5F6ABE19B9DC}" dt="2026-10-06T06:29:44.812" v="28"/>
+          <ac:spMkLst>
+            <pc:docMk/>
+            <pc:sldMk cId="171703210" sldId="269"/>
+            <ac:spMk id="2" creationId="{273FFB7E-EC4D-3C6B-BACA-15F29756A734}"/>
+          </ac:spMkLst>
+        </pc:spChg>
+      </pc:sldChg>
+      <pc:sldChg chg="addSp modSp">
+        <pc:chgData name="Florian Kattner HMU Potsdam" userId="b781a7f8-b6b6-4bfe-b2a2-6a9fc406e1ad" providerId="ADAL" clId="{07617DBD-06FC-4AB1-929F-5F6ABE19B9DC}" dt="2026-10-06T06:29:51.669" v="29"/>
+        <pc:sldMkLst>
+          <pc:docMk/>
+          <pc:sldMk cId="325823577" sldId="270"/>
+        </pc:sldMkLst>
+        <pc:spChg chg="add mod">
+          <ac:chgData name="Florian Kattner HMU Potsdam" userId="b781a7f8-b6b6-4bfe-b2a2-6a9fc406e1ad" providerId="ADAL" clId="{07617DBD-06FC-4AB1-929F-5F6ABE19B9DC}" dt="2026-10-06T06:29:51.669" v="29"/>
+          <ac:spMkLst>
+            <pc:docMk/>
+            <pc:sldMk cId="325823577" sldId="270"/>
+            <ac:spMk id="2" creationId="{4A88168C-487C-8101-CD53-F95D5EA9081D}"/>
+          </ac:spMkLst>
+        </pc:spChg>
+      </pc:sldChg>
+      <pc:sldChg chg="addSp modSp">
+        <pc:chgData name="Florian Kattner HMU Potsdam" userId="b781a7f8-b6b6-4bfe-b2a2-6a9fc406e1ad" providerId="ADAL" clId="{07617DBD-06FC-4AB1-929F-5F6ABE19B9DC}" dt="2026-10-06T06:29:54.110" v="32"/>
+        <pc:sldMkLst>
+          <pc:docMk/>
+          <pc:sldMk cId="1649348587" sldId="271"/>
+        </pc:sldMkLst>
+        <pc:spChg chg="add mod">
+          <ac:chgData name="Florian Kattner HMU Potsdam" userId="b781a7f8-b6b6-4bfe-b2a2-6a9fc406e1ad" providerId="ADAL" clId="{07617DBD-06FC-4AB1-929F-5F6ABE19B9DC}" dt="2026-10-06T06:29:54.110" v="32"/>
+          <ac:spMkLst>
+            <pc:docMk/>
+            <pc:sldMk cId="1649348587" sldId="271"/>
+            <ac:spMk id="2" creationId="{1D8ABECF-2211-0968-B3B3-824179B36A13}"/>
+          </ac:spMkLst>
+        </pc:spChg>
+      </pc:sldChg>
+      <pc:sldChg chg="addSp modSp">
+        <pc:chgData name="Florian Kattner HMU Potsdam" userId="b781a7f8-b6b6-4bfe-b2a2-6a9fc406e1ad" providerId="ADAL" clId="{07617DBD-06FC-4AB1-929F-5F6ABE19B9DC}" dt="2026-10-06T06:29:53.373" v="31"/>
+        <pc:sldMkLst>
+          <pc:docMk/>
+          <pc:sldMk cId="1557170403" sldId="272"/>
+        </pc:sldMkLst>
+        <pc:spChg chg="add mod">
+          <ac:chgData name="Florian Kattner HMU Potsdam" userId="b781a7f8-b6b6-4bfe-b2a2-6a9fc406e1ad" providerId="ADAL" clId="{07617DBD-06FC-4AB1-929F-5F6ABE19B9DC}" dt="2026-10-06T06:29:53.373" v="31"/>
+          <ac:spMkLst>
+            <pc:docMk/>
+            <pc:sldMk cId="1557170403" sldId="272"/>
+            <ac:spMk id="2" creationId="{62D77FB7-4953-038A-CAA6-4C0CCB828073}"/>
+          </ac:spMkLst>
+        </pc:spChg>
+      </pc:sldChg>
+      <pc:sldChg chg="addSp modSp">
+        <pc:chgData name="Florian Kattner HMU Potsdam" userId="b781a7f8-b6b6-4bfe-b2a2-6a9fc406e1ad" providerId="ADAL" clId="{07617DBD-06FC-4AB1-929F-5F6ABE19B9DC}" dt="2026-10-06T06:29:55.267" v="33"/>
+        <pc:sldMkLst>
+          <pc:docMk/>
+          <pc:sldMk cId="3449909443" sldId="273"/>
+        </pc:sldMkLst>
+        <pc:spChg chg="add mod">
+          <ac:chgData name="Florian Kattner HMU Potsdam" userId="b781a7f8-b6b6-4bfe-b2a2-6a9fc406e1ad" providerId="ADAL" clId="{07617DBD-06FC-4AB1-929F-5F6ABE19B9DC}" dt="2026-10-06T06:29:55.267" v="33"/>
+          <ac:spMkLst>
+            <pc:docMk/>
+            <pc:sldMk cId="3449909443" sldId="273"/>
+            <ac:spMk id="2" creationId="{C81E5239-1157-4BA6-04F0-AB9E97B78D6F}"/>
+          </ac:spMkLst>
+        </pc:spChg>
+      </pc:sldChg>
+      <pc:sldChg chg="addSp modSp">
+        <pc:chgData name="Florian Kattner HMU Potsdam" userId="b781a7f8-b6b6-4bfe-b2a2-6a9fc406e1ad" providerId="ADAL" clId="{07617DBD-06FC-4AB1-929F-5F6ABE19B9DC}" dt="2026-10-06T06:29:56.037" v="34"/>
+        <pc:sldMkLst>
+          <pc:docMk/>
+          <pc:sldMk cId="4204426100" sldId="275"/>
+        </pc:sldMkLst>
+        <pc:spChg chg="add mod">
+          <ac:chgData name="Florian Kattner HMU Potsdam" userId="b781a7f8-b6b6-4bfe-b2a2-6a9fc406e1ad" providerId="ADAL" clId="{07617DBD-06FC-4AB1-929F-5F6ABE19B9DC}" dt="2026-10-06T06:29:56.037" v="34"/>
+          <ac:spMkLst>
+            <pc:docMk/>
+            <pc:sldMk cId="4204426100" sldId="275"/>
+            <ac:spMk id="2" creationId="{E188D8FD-A35E-F162-FA56-A6E6D1D9C739}"/>
+          </ac:spMkLst>
+        </pc:spChg>
+      </pc:sldChg>
+      <pc:sldChg chg="addSp modSp">
+        <pc:chgData name="Florian Kattner HMU Potsdam" userId="b781a7f8-b6b6-4bfe-b2a2-6a9fc406e1ad" providerId="ADAL" clId="{07617DBD-06FC-4AB1-929F-5F6ABE19B9DC}" dt="2026-10-06T06:29:56.773" v="35"/>
+        <pc:sldMkLst>
+          <pc:docMk/>
+          <pc:sldMk cId="1401187810" sldId="276"/>
+        </pc:sldMkLst>
+        <pc:spChg chg="add mod">
+          <ac:chgData name="Florian Kattner HMU Potsdam" userId="b781a7f8-b6b6-4bfe-b2a2-6a9fc406e1ad" providerId="ADAL" clId="{07617DBD-06FC-4AB1-929F-5F6ABE19B9DC}" dt="2026-10-06T06:29:56.773" v="35"/>
+          <ac:spMkLst>
+            <pc:docMk/>
+            <pc:sldMk cId="1401187810" sldId="276"/>
+            <ac:spMk id="2" creationId="{0A703D22-309F-DB6D-641A-6586939F9FEC}"/>
+          </ac:spMkLst>
+        </pc:spChg>
+      </pc:sldChg>
+      <pc:sldChg chg="addSp modSp">
+        <pc:chgData name="Florian Kattner HMU Potsdam" userId="b781a7f8-b6b6-4bfe-b2a2-6a9fc406e1ad" providerId="ADAL" clId="{07617DBD-06FC-4AB1-929F-5F6ABE19B9DC}" dt="2026-10-06T06:29:57.430" v="36"/>
+        <pc:sldMkLst>
+          <pc:docMk/>
+          <pc:sldMk cId="3212974201" sldId="277"/>
+        </pc:sldMkLst>
+        <pc:spChg chg="add mod">
+          <ac:chgData name="Florian Kattner HMU Potsdam" userId="b781a7f8-b6b6-4bfe-b2a2-6a9fc406e1ad" providerId="ADAL" clId="{07617DBD-06FC-4AB1-929F-5F6ABE19B9DC}" dt="2026-10-06T06:29:57.430" v="36"/>
+          <ac:spMkLst>
+            <pc:docMk/>
+            <pc:sldMk cId="3212974201" sldId="277"/>
+            <ac:spMk id="2" creationId="{51747E33-3420-3164-C3DF-58914D4B1161}"/>
+          </ac:spMkLst>
+        </pc:spChg>
+      </pc:sldChg>
+      <pc:sldChg chg="addSp modSp">
+        <pc:chgData name="Florian Kattner HMU Potsdam" userId="b781a7f8-b6b6-4bfe-b2a2-6a9fc406e1ad" providerId="ADAL" clId="{07617DBD-06FC-4AB1-929F-5F6ABE19B9DC}" dt="2026-10-06T06:29:58.541" v="38"/>
+        <pc:sldMkLst>
+          <pc:docMk/>
+          <pc:sldMk cId="952047407" sldId="278"/>
+        </pc:sldMkLst>
+        <pc:spChg chg="add mod">
+          <ac:chgData name="Florian Kattner HMU Potsdam" userId="b781a7f8-b6b6-4bfe-b2a2-6a9fc406e1ad" providerId="ADAL" clId="{07617DBD-06FC-4AB1-929F-5F6ABE19B9DC}" dt="2026-10-06T06:29:58.541" v="38"/>
+          <ac:spMkLst>
+            <pc:docMk/>
+            <pc:sldMk cId="952047407" sldId="278"/>
+            <ac:spMk id="2" creationId="{599BB392-520B-E1B8-EF76-8C8B822F65FA}"/>
+          </ac:spMkLst>
+        </pc:spChg>
+      </pc:sldChg>
+      <pc:sldChg chg="addSp modSp">
+        <pc:chgData name="Florian Kattner HMU Potsdam" userId="b781a7f8-b6b6-4bfe-b2a2-6a9fc406e1ad" providerId="ADAL" clId="{07617DBD-06FC-4AB1-929F-5F6ABE19B9DC}" dt="2026-10-06T06:29:59.173" v="39"/>
+        <pc:sldMkLst>
+          <pc:docMk/>
+          <pc:sldMk cId="544431349" sldId="279"/>
+        </pc:sldMkLst>
+        <pc:spChg chg="add mod">
+          <ac:chgData name="Florian Kattner HMU Potsdam" userId="b781a7f8-b6b6-4bfe-b2a2-6a9fc406e1ad" providerId="ADAL" clId="{07617DBD-06FC-4AB1-929F-5F6ABE19B9DC}" dt="2026-10-06T06:29:59.173" v="39"/>
+          <ac:spMkLst>
+            <pc:docMk/>
+            <pc:sldMk cId="544431349" sldId="279"/>
+            <ac:spMk id="2" creationId="{37D9A45E-67FC-72FF-650F-7232A4E4A09F}"/>
+          </ac:spMkLst>
+        </pc:spChg>
+      </pc:sldChg>
+      <pc:sldChg chg="addSp modSp">
+        <pc:chgData name="Florian Kattner HMU Potsdam" userId="b781a7f8-b6b6-4bfe-b2a2-6a9fc406e1ad" providerId="ADAL" clId="{07617DBD-06FC-4AB1-929F-5F6ABE19B9DC}" dt="2026-10-06T06:29:58.006" v="37"/>
+        <pc:sldMkLst>
+          <pc:docMk/>
+          <pc:sldMk cId="11482510" sldId="280"/>
+        </pc:sldMkLst>
+        <pc:spChg chg="add mod">
+          <ac:chgData name="Florian Kattner HMU Potsdam" userId="b781a7f8-b6b6-4bfe-b2a2-6a9fc406e1ad" providerId="ADAL" clId="{07617DBD-06FC-4AB1-929F-5F6ABE19B9DC}" dt="2026-10-06T06:29:58.006" v="37"/>
+          <ac:spMkLst>
+            <pc:docMk/>
+            <pc:sldMk cId="11482510" sldId="280"/>
+            <ac:spMk id="2" creationId="{C123B933-24FE-E94D-DFF4-2C57D56157A3}"/>
+          </ac:spMkLst>
+        </pc:spChg>
+      </pc:sldChg>
+      <pc:sldChg chg="addSp modSp">
+        <pc:chgData name="Florian Kattner HMU Potsdam" userId="b781a7f8-b6b6-4bfe-b2a2-6a9fc406e1ad" providerId="ADAL" clId="{07617DBD-06FC-4AB1-929F-5F6ABE19B9DC}" dt="2026-10-06T06:30:02.976" v="42"/>
+        <pc:sldMkLst>
+          <pc:docMk/>
+          <pc:sldMk cId="3599209834" sldId="281"/>
+        </pc:sldMkLst>
+        <pc:spChg chg="add mod">
+          <ac:chgData name="Florian Kattner HMU Potsdam" userId="b781a7f8-b6b6-4bfe-b2a2-6a9fc406e1ad" providerId="ADAL" clId="{07617DBD-06FC-4AB1-929F-5F6ABE19B9DC}" dt="2026-10-06T06:30:02.976" v="42"/>
+          <ac:spMkLst>
+            <pc:docMk/>
+            <pc:sldMk cId="3599209834" sldId="281"/>
+            <ac:spMk id="2" creationId="{73DB2C7C-8FBF-720C-DA5E-DC97ED0AB08E}"/>
+          </ac:spMkLst>
+        </pc:spChg>
+      </pc:sldChg>
+      <pc:sldChg chg="addSp modSp">
+        <pc:chgData name="Florian Kattner HMU Potsdam" userId="b781a7f8-b6b6-4bfe-b2a2-6a9fc406e1ad" providerId="ADAL" clId="{07617DBD-06FC-4AB1-929F-5F6ABE19B9DC}" dt="2026-10-06T06:30:03.758" v="43"/>
+        <pc:sldMkLst>
+          <pc:docMk/>
+          <pc:sldMk cId="1028671814" sldId="282"/>
+        </pc:sldMkLst>
+        <pc:spChg chg="add mod">
+          <ac:chgData name="Florian Kattner HMU Potsdam" userId="b781a7f8-b6b6-4bfe-b2a2-6a9fc406e1ad" providerId="ADAL" clId="{07617DBD-06FC-4AB1-929F-5F6ABE19B9DC}" dt="2026-10-06T06:30:03.758" v="43"/>
+          <ac:spMkLst>
+            <pc:docMk/>
+            <pc:sldMk cId="1028671814" sldId="282"/>
+            <ac:spMk id="2" creationId="{3E8199AE-86D6-25D6-9CF4-24D647F86FED}"/>
+          </ac:spMkLst>
+        </pc:spChg>
+      </pc:sldChg>
+      <pc:sldChg chg="addSp modSp">
+        <pc:chgData name="Florian Kattner HMU Potsdam" userId="b781a7f8-b6b6-4bfe-b2a2-6a9fc406e1ad" providerId="ADAL" clId="{07617DBD-06FC-4AB1-929F-5F6ABE19B9DC}" dt="2026-10-06T06:30:00.060" v="40"/>
+        <pc:sldMkLst>
+          <pc:docMk/>
+          <pc:sldMk cId="537062801" sldId="283"/>
+        </pc:sldMkLst>
+        <pc:spChg chg="add mod">
+          <ac:chgData name="Florian Kattner HMU Potsdam" userId="b781a7f8-b6b6-4bfe-b2a2-6a9fc406e1ad" providerId="ADAL" clId="{07617DBD-06FC-4AB1-929F-5F6ABE19B9DC}" dt="2026-10-06T06:30:00.060" v="40"/>
+          <ac:spMkLst>
+            <pc:docMk/>
+            <pc:sldMk cId="537062801" sldId="283"/>
+            <ac:spMk id="2" creationId="{501922AD-6803-47B9-337E-3A0D9A87A4F5}"/>
+          </ac:spMkLst>
+        </pc:spChg>
+      </pc:sldChg>
+      <pc:sldChg chg="addSp modSp">
+        <pc:chgData name="Florian Kattner HMU Potsdam" userId="b781a7f8-b6b6-4bfe-b2a2-6a9fc406e1ad" providerId="ADAL" clId="{07617DBD-06FC-4AB1-929F-5F6ABE19B9DC}" dt="2026-10-06T06:30:02.045" v="41"/>
+        <pc:sldMkLst>
+          <pc:docMk/>
+          <pc:sldMk cId="1243896534" sldId="284"/>
+        </pc:sldMkLst>
+        <pc:spChg chg="add mod">
+          <ac:chgData name="Florian Kattner HMU Potsdam" userId="b781a7f8-b6b6-4bfe-b2a2-6a9fc406e1ad" providerId="ADAL" clId="{07617DBD-06FC-4AB1-929F-5F6ABE19B9DC}" dt="2026-10-06T06:30:02.045" v="41"/>
+          <ac:spMkLst>
+            <pc:docMk/>
+            <pc:sldMk cId="1243896534" sldId="284"/>
+            <ac:spMk id="2" creationId="{9A6853AF-EB41-37EB-C45D-3681CA0B1578}"/>
+          </ac:spMkLst>
+        </pc:spChg>
+      </pc:sldChg>
+      <pc:sldChg chg="addSp modSp">
+        <pc:chgData name="Florian Kattner HMU Potsdam" userId="b781a7f8-b6b6-4bfe-b2a2-6a9fc406e1ad" providerId="ADAL" clId="{07617DBD-06FC-4AB1-929F-5F6ABE19B9DC}" dt="2026-10-06T06:30:05.303" v="45"/>
+        <pc:sldMkLst>
+          <pc:docMk/>
+          <pc:sldMk cId="219460526" sldId="285"/>
+        </pc:sldMkLst>
+        <pc:spChg chg="add mod">
+          <ac:chgData name="Florian Kattner HMU Potsdam" userId="b781a7f8-b6b6-4bfe-b2a2-6a9fc406e1ad" providerId="ADAL" clId="{07617DBD-06FC-4AB1-929F-5F6ABE19B9DC}" dt="2026-10-06T06:30:05.303" v="45"/>
+          <ac:spMkLst>
+            <pc:docMk/>
+            <pc:sldMk cId="219460526" sldId="285"/>
+            <ac:spMk id="2" creationId="{AA1A652F-6BF7-F782-EE86-9E5612FD236E}"/>
+          </ac:spMkLst>
+        </pc:spChg>
+      </pc:sldChg>
+      <pc:sldChg chg="addSp modSp">
+        <pc:chgData name="Florian Kattner HMU Potsdam" userId="b781a7f8-b6b6-4bfe-b2a2-6a9fc406e1ad" providerId="ADAL" clId="{07617DBD-06FC-4AB1-929F-5F6ABE19B9DC}" dt="2026-10-06T06:30:04.571" v="44"/>
+        <pc:sldMkLst>
+          <pc:docMk/>
+          <pc:sldMk cId="2531755557" sldId="286"/>
+        </pc:sldMkLst>
+        <pc:spChg chg="add mod">
+          <ac:chgData name="Florian Kattner HMU Potsdam" userId="b781a7f8-b6b6-4bfe-b2a2-6a9fc406e1ad" providerId="ADAL" clId="{07617DBD-06FC-4AB1-929F-5F6ABE19B9DC}" dt="2026-10-06T06:30:04.571" v="44"/>
+          <ac:spMkLst>
+            <pc:docMk/>
+            <pc:sldMk cId="2531755557" sldId="286"/>
+            <ac:spMk id="2" creationId="{2A4D2E01-85C3-EDBC-9C3D-B213A6149C66}"/>
+          </ac:spMkLst>
+        </pc:spChg>
+      </pc:sldChg>
+      <pc:sldChg chg="addSp modSp">
+        <pc:chgData name="Florian Kattner HMU Potsdam" userId="b781a7f8-b6b6-4bfe-b2a2-6a9fc406e1ad" providerId="ADAL" clId="{07617DBD-06FC-4AB1-929F-5F6ABE19B9DC}" dt="2026-10-06T06:30:06.045" v="46"/>
+        <pc:sldMkLst>
+          <pc:docMk/>
+          <pc:sldMk cId="2471067168" sldId="287"/>
+        </pc:sldMkLst>
+        <pc:spChg chg="add mod">
+          <ac:chgData name="Florian Kattner HMU Potsdam" userId="b781a7f8-b6b6-4bfe-b2a2-6a9fc406e1ad" providerId="ADAL" clId="{07617DBD-06FC-4AB1-929F-5F6ABE19B9DC}" dt="2026-10-06T06:30:06.045" v="46"/>
+          <ac:spMkLst>
+            <pc:docMk/>
+            <pc:sldMk cId="2471067168" sldId="287"/>
+            <ac:spMk id="2" creationId="{1B10FC15-F9CA-A816-50AD-073AF78B6105}"/>
+          </ac:spMkLst>
+        </pc:spChg>
+      </pc:sldChg>
+      <pc:sldChg chg="addSp modSp">
+        <pc:chgData name="Florian Kattner HMU Potsdam" userId="b781a7f8-b6b6-4bfe-b2a2-6a9fc406e1ad" providerId="ADAL" clId="{07617DBD-06FC-4AB1-929F-5F6ABE19B9DC}" dt="2026-10-06T06:30:06.766" v="47"/>
+        <pc:sldMkLst>
+          <pc:docMk/>
+          <pc:sldMk cId="636266786" sldId="288"/>
+        </pc:sldMkLst>
+        <pc:spChg chg="add mod">
+          <ac:chgData name="Florian Kattner HMU Potsdam" userId="b781a7f8-b6b6-4bfe-b2a2-6a9fc406e1ad" providerId="ADAL" clId="{07617DBD-06FC-4AB1-929F-5F6ABE19B9DC}" dt="2026-10-06T06:30:06.766" v="47"/>
+          <ac:spMkLst>
+            <pc:docMk/>
+            <pc:sldMk cId="636266786" sldId="288"/>
+            <ac:spMk id="2" creationId="{EFDED20D-F1D3-DEAF-F46B-BAD11C69F1DA}"/>
+          </ac:spMkLst>
+        </pc:spChg>
+      </pc:sldChg>
+      <pc:sldChg chg="addSp modSp">
+        <pc:chgData name="Florian Kattner HMU Potsdam" userId="b781a7f8-b6b6-4bfe-b2a2-6a9fc406e1ad" providerId="ADAL" clId="{07617DBD-06FC-4AB1-929F-5F6ABE19B9DC}" dt="2026-10-06T06:30:07.445" v="48"/>
+        <pc:sldMkLst>
+          <pc:docMk/>
+          <pc:sldMk cId="2570570920" sldId="289"/>
+        </pc:sldMkLst>
+        <pc:spChg chg="add mod">
+          <ac:chgData name="Florian Kattner HMU Potsdam" userId="b781a7f8-b6b6-4bfe-b2a2-6a9fc406e1ad" providerId="ADAL" clId="{07617DBD-06FC-4AB1-929F-5F6ABE19B9DC}" dt="2026-10-06T06:30:07.445" v="48"/>
+          <ac:spMkLst>
+            <pc:docMk/>
+            <pc:sldMk cId="2570570920" sldId="289"/>
+            <ac:spMk id="2" creationId="{CD45CE1C-33F4-37C0-39F3-94EF47053498}"/>
+          </ac:spMkLst>
+        </pc:spChg>
+      </pc:sldChg>
+      <pc:sldChg chg="addSp modSp">
+        <pc:chgData name="Florian Kattner HMU Potsdam" userId="b781a7f8-b6b6-4bfe-b2a2-6a9fc406e1ad" providerId="ADAL" clId="{07617DBD-06FC-4AB1-929F-5F6ABE19B9DC}" dt="2026-10-06T06:30:08.181" v="49"/>
+        <pc:sldMkLst>
+          <pc:docMk/>
+          <pc:sldMk cId="357771711" sldId="290"/>
+        </pc:sldMkLst>
+        <pc:spChg chg="add mod">
+          <ac:chgData name="Florian Kattner HMU Potsdam" userId="b781a7f8-b6b6-4bfe-b2a2-6a9fc406e1ad" providerId="ADAL" clId="{07617DBD-06FC-4AB1-929F-5F6ABE19B9DC}" dt="2026-10-06T06:30:08.181" v="49"/>
+          <ac:spMkLst>
+            <pc:docMk/>
+            <pc:sldMk cId="357771711" sldId="290"/>
+            <ac:spMk id="2" creationId="{6958A1D3-EF84-0361-3352-577BC5FB826A}"/>
+          </ac:spMkLst>
+        </pc:spChg>
+      </pc:sldChg>
+      <pc:sldChg chg="addSp modSp">
+        <pc:chgData name="Florian Kattner HMU Potsdam" userId="b781a7f8-b6b6-4bfe-b2a2-6a9fc406e1ad" providerId="ADAL" clId="{07617DBD-06FC-4AB1-929F-5F6ABE19B9DC}" dt="2026-10-06T06:30:08.917" v="50"/>
+        <pc:sldMkLst>
+          <pc:docMk/>
+          <pc:sldMk cId="3822526898" sldId="291"/>
+        </pc:sldMkLst>
+        <pc:spChg chg="add mod">
+          <ac:chgData name="Florian Kattner HMU Potsdam" userId="b781a7f8-b6b6-4bfe-b2a2-6a9fc406e1ad" providerId="ADAL" clId="{07617DBD-06FC-4AB1-929F-5F6ABE19B9DC}" dt="2026-10-06T06:30:08.917" v="50"/>
+          <ac:spMkLst>
+            <pc:docMk/>
+            <pc:sldMk cId="3822526898" sldId="291"/>
+            <ac:spMk id="2" creationId="{27473632-79A0-6D33-909D-B6483F523D57}"/>
+          </ac:spMkLst>
+        </pc:spChg>
+      </pc:sldChg>
+      <pc:sldChg chg="addSp modSp">
+        <pc:chgData name="Florian Kattner HMU Potsdam" userId="b781a7f8-b6b6-4bfe-b2a2-6a9fc406e1ad" providerId="ADAL" clId="{07617DBD-06FC-4AB1-929F-5F6ABE19B9DC}" dt="2026-10-06T06:30:09.637" v="51"/>
+        <pc:sldMkLst>
+          <pc:docMk/>
+          <pc:sldMk cId="2015114443" sldId="292"/>
+        </pc:sldMkLst>
+        <pc:spChg chg="add mod">
+          <ac:chgData name="Florian Kattner HMU Potsdam" userId="b781a7f8-b6b6-4bfe-b2a2-6a9fc406e1ad" providerId="ADAL" clId="{07617DBD-06FC-4AB1-929F-5F6ABE19B9DC}" dt="2026-10-06T06:30:09.637" v="51"/>
+          <ac:spMkLst>
+            <pc:docMk/>
+            <pc:sldMk cId="2015114443" sldId="292"/>
+            <ac:spMk id="2" creationId="{C598CB74-96CB-790B-923C-AE55DA82BF2C}"/>
+          </ac:spMkLst>
+        </pc:spChg>
+      </pc:sldChg>
+      <pc:sldChg chg="addSp modSp">
+        <pc:chgData name="Florian Kattner HMU Potsdam" userId="b781a7f8-b6b6-4bfe-b2a2-6a9fc406e1ad" providerId="ADAL" clId="{07617DBD-06FC-4AB1-929F-5F6ABE19B9DC}" dt="2026-10-06T06:30:10.316" v="52"/>
+        <pc:sldMkLst>
+          <pc:docMk/>
+          <pc:sldMk cId="976896503" sldId="293"/>
+        </pc:sldMkLst>
+        <pc:spChg chg="add mod">
+          <ac:chgData name="Florian Kattner HMU Potsdam" userId="b781a7f8-b6b6-4bfe-b2a2-6a9fc406e1ad" providerId="ADAL" clId="{07617DBD-06FC-4AB1-929F-5F6ABE19B9DC}" dt="2026-10-06T06:30:10.316" v="52"/>
+          <ac:spMkLst>
+            <pc:docMk/>
+            <pc:sldMk cId="976896503" sldId="293"/>
+            <ac:spMk id="2" creationId="{2E027635-8A40-5D27-8BA1-09A489B7C8DE}"/>
+          </ac:spMkLst>
+        </pc:spChg>
       </pc:sldChg>
     </pc:docChg>
   </pc:docChgLst>
@@ -6246,6 +6766,58 @@
           </a:prstGeom>
         </p:spPr>
       </p:pic>
+      <p:sp>
+        <p:nvSpPr>
+          <p:cNvPr id="3" name="Textfeld 2">
+            <a:extLst>
+              <a:ext uri="{FF2B5EF4-FFF2-40B4-BE49-F238E27FC236}">
+                <a16:creationId xmlns:a16="http://schemas.microsoft.com/office/drawing/2014/main" id="{971B47C8-2426-FB44-F2F5-CDCF0ED93F41}"/>
+              </a:ext>
+            </a:extLst>
+          </p:cNvPr>
+          <p:cNvSpPr txBox="1"/>
+          <p:nvPr/>
+        </p:nvSpPr>
+        <p:spPr>
+          <a:xfrm>
+            <a:off x="0" y="0"/>
+            <a:ext cx="2448272" cy="338554"/>
+          </a:xfrm>
+          <a:prstGeom prst="rect">
+            <a:avLst/>
+          </a:prstGeom>
+          <a:noFill/>
+        </p:spPr>
+        <p:txBody>
+          <a:bodyPr wrap="square" rtlCol="0">
+            <a:spAutoFit/>
+          </a:bodyPr>
+          <a:lstStyle/>
+          <a:p>
+            <a:r>
+              <a:rPr lang="de-DE" sz="1600" dirty="0">
+                <a:latin typeface="Lato" panose="020F0502020204030203" pitchFamily="34" charset="0"/>
+                <a:ea typeface="Lato" panose="020F0502020204030203" pitchFamily="34" charset="0"/>
+                <a:cs typeface="Lato" panose="020F0502020204030203" pitchFamily="34" charset="0"/>
+              </a:rPr>
+              <a:t>Durchgang </a:t>
+            </a:r>
+            <a:fld id="{F6753D12-211B-4EF5-AA64-00216E01E36B}" type="slidenum">
+              <a:rPr lang="de-DE" sz="1600" smtClean="0">
+                <a:latin typeface="Lato" panose="020F0502020204030203" pitchFamily="34" charset="0"/>
+                <a:ea typeface="Lato" panose="020F0502020204030203" pitchFamily="34" charset="0"/>
+                <a:cs typeface="Lato" panose="020F0502020204030203" pitchFamily="34" charset="0"/>
+              </a:rPr>
+              <a:t>1</a:t>
+            </a:fld>
+            <a:endParaRPr lang="de-DE" sz="1600" dirty="0">
+              <a:latin typeface="Lato" panose="020F0502020204030203" pitchFamily="34" charset="0"/>
+              <a:ea typeface="Lato" panose="020F0502020204030203" pitchFamily="34" charset="0"/>
+              <a:cs typeface="Lato" panose="020F0502020204030203" pitchFamily="34" charset="0"/>
+            </a:endParaRPr>
+          </a:p>
+        </p:txBody>
+      </p:sp>
     </p:spTree>
     <p:extLst>
       <p:ext uri="{BB962C8B-B14F-4D97-AF65-F5344CB8AC3E}">
@@ -6309,6 +6881,58 @@
           </a:prstGeom>
         </p:spPr>
       </p:pic>
+      <p:sp>
+        <p:nvSpPr>
+          <p:cNvPr id="2" name="Textfeld 1">
+            <a:extLst>
+              <a:ext uri="{FF2B5EF4-FFF2-40B4-BE49-F238E27FC236}">
+                <a16:creationId xmlns:a16="http://schemas.microsoft.com/office/drawing/2014/main" id="{4A88168C-487C-8101-CD53-F95D5EA9081D}"/>
+              </a:ext>
+            </a:extLst>
+          </p:cNvPr>
+          <p:cNvSpPr txBox="1"/>
+          <p:nvPr/>
+        </p:nvSpPr>
+        <p:spPr>
+          <a:xfrm>
+            <a:off x="0" y="0"/>
+            <a:ext cx="2448272" cy="338554"/>
+          </a:xfrm>
+          <a:prstGeom prst="rect">
+            <a:avLst/>
+          </a:prstGeom>
+          <a:noFill/>
+        </p:spPr>
+        <p:txBody>
+          <a:bodyPr wrap="square" rtlCol="0">
+            <a:spAutoFit/>
+          </a:bodyPr>
+          <a:lstStyle/>
+          <a:p>
+            <a:r>
+              <a:rPr lang="de-DE" sz="1600" dirty="0">
+                <a:latin typeface="Lato" panose="020F0502020204030203" pitchFamily="34" charset="0"/>
+                <a:ea typeface="Lato" panose="020F0502020204030203" pitchFamily="34" charset="0"/>
+                <a:cs typeface="Lato" panose="020F0502020204030203" pitchFamily="34" charset="0"/>
+              </a:rPr>
+              <a:t>Durchgang </a:t>
+            </a:r>
+            <a:fld id="{F6753D12-211B-4EF5-AA64-00216E01E36B}" type="slidenum">
+              <a:rPr lang="de-DE" sz="1600" smtClean="0">
+                <a:latin typeface="Lato" panose="020F0502020204030203" pitchFamily="34" charset="0"/>
+                <a:ea typeface="Lato" panose="020F0502020204030203" pitchFamily="34" charset="0"/>
+                <a:cs typeface="Lato" panose="020F0502020204030203" pitchFamily="34" charset="0"/>
+              </a:rPr>
+              <a:t>10</a:t>
+            </a:fld>
+            <a:endParaRPr lang="de-DE" sz="1600" dirty="0">
+              <a:latin typeface="Lato" panose="020F0502020204030203" pitchFamily="34" charset="0"/>
+              <a:ea typeface="Lato" panose="020F0502020204030203" pitchFamily="34" charset="0"/>
+              <a:cs typeface="Lato" panose="020F0502020204030203" pitchFamily="34" charset="0"/>
+            </a:endParaRPr>
+          </a:p>
+        </p:txBody>
+      </p:sp>
     </p:spTree>
     <p:extLst>
       <p:ext uri="{BB962C8B-B14F-4D97-AF65-F5344CB8AC3E}">
@@ -6372,6 +6996,58 @@
           </a:prstGeom>
         </p:spPr>
       </p:pic>
+      <p:sp>
+        <p:nvSpPr>
+          <p:cNvPr id="2" name="Textfeld 1">
+            <a:extLst>
+              <a:ext uri="{FF2B5EF4-FFF2-40B4-BE49-F238E27FC236}">
+                <a16:creationId xmlns:a16="http://schemas.microsoft.com/office/drawing/2014/main" id="{D2296B83-4A5D-7A32-44FC-53CF132EB98B}"/>
+              </a:ext>
+            </a:extLst>
+          </p:cNvPr>
+          <p:cNvSpPr txBox="1"/>
+          <p:nvPr/>
+        </p:nvSpPr>
+        <p:spPr>
+          <a:xfrm>
+            <a:off x="0" y="0"/>
+            <a:ext cx="2448272" cy="338554"/>
+          </a:xfrm>
+          <a:prstGeom prst="rect">
+            <a:avLst/>
+          </a:prstGeom>
+          <a:noFill/>
+        </p:spPr>
+        <p:txBody>
+          <a:bodyPr wrap="square" rtlCol="0">
+            <a:spAutoFit/>
+          </a:bodyPr>
+          <a:lstStyle/>
+          <a:p>
+            <a:r>
+              <a:rPr lang="de-DE" sz="1600" dirty="0">
+                <a:latin typeface="Lato" panose="020F0502020204030203" pitchFamily="34" charset="0"/>
+                <a:ea typeface="Lato" panose="020F0502020204030203" pitchFamily="34" charset="0"/>
+                <a:cs typeface="Lato" panose="020F0502020204030203" pitchFamily="34" charset="0"/>
+              </a:rPr>
+              <a:t>Durchgang </a:t>
+            </a:r>
+            <a:fld id="{F6753D12-211B-4EF5-AA64-00216E01E36B}" type="slidenum">
+              <a:rPr lang="de-DE" sz="1600" smtClean="0">
+                <a:latin typeface="Lato" panose="020F0502020204030203" pitchFamily="34" charset="0"/>
+                <a:ea typeface="Lato" panose="020F0502020204030203" pitchFamily="34" charset="0"/>
+                <a:cs typeface="Lato" panose="020F0502020204030203" pitchFamily="34" charset="0"/>
+              </a:rPr>
+              <a:t>11</a:t>
+            </a:fld>
+            <a:endParaRPr lang="de-DE" sz="1600" dirty="0">
+              <a:latin typeface="Lato" panose="020F0502020204030203" pitchFamily="34" charset="0"/>
+              <a:ea typeface="Lato" panose="020F0502020204030203" pitchFamily="34" charset="0"/>
+              <a:cs typeface="Lato" panose="020F0502020204030203" pitchFamily="34" charset="0"/>
+            </a:endParaRPr>
+          </a:p>
+        </p:txBody>
+      </p:sp>
     </p:spTree>
     <p:extLst>
       <p:ext uri="{BB962C8B-B14F-4D97-AF65-F5344CB8AC3E}">
@@ -6435,6 +7111,58 @@
           </a:prstGeom>
         </p:spPr>
       </p:pic>
+      <p:sp>
+        <p:nvSpPr>
+          <p:cNvPr id="2" name="Textfeld 1">
+            <a:extLst>
+              <a:ext uri="{FF2B5EF4-FFF2-40B4-BE49-F238E27FC236}">
+                <a16:creationId xmlns:a16="http://schemas.microsoft.com/office/drawing/2014/main" id="{62D77FB7-4953-038A-CAA6-4C0CCB828073}"/>
+              </a:ext>
+            </a:extLst>
+          </p:cNvPr>
+          <p:cNvSpPr txBox="1"/>
+          <p:nvPr/>
+        </p:nvSpPr>
+        <p:spPr>
+          <a:xfrm>
+            <a:off x="0" y="0"/>
+            <a:ext cx="2448272" cy="338554"/>
+          </a:xfrm>
+          <a:prstGeom prst="rect">
+            <a:avLst/>
+          </a:prstGeom>
+          <a:noFill/>
+        </p:spPr>
+        <p:txBody>
+          <a:bodyPr wrap="square" rtlCol="0">
+            <a:spAutoFit/>
+          </a:bodyPr>
+          <a:lstStyle/>
+          <a:p>
+            <a:r>
+              <a:rPr lang="de-DE" sz="1600" dirty="0">
+                <a:latin typeface="Lato" panose="020F0502020204030203" pitchFamily="34" charset="0"/>
+                <a:ea typeface="Lato" panose="020F0502020204030203" pitchFamily="34" charset="0"/>
+                <a:cs typeface="Lato" panose="020F0502020204030203" pitchFamily="34" charset="0"/>
+              </a:rPr>
+              <a:t>Durchgang </a:t>
+            </a:r>
+            <a:fld id="{F6753D12-211B-4EF5-AA64-00216E01E36B}" type="slidenum">
+              <a:rPr lang="de-DE" sz="1600" smtClean="0">
+                <a:latin typeface="Lato" panose="020F0502020204030203" pitchFamily="34" charset="0"/>
+                <a:ea typeface="Lato" panose="020F0502020204030203" pitchFamily="34" charset="0"/>
+                <a:cs typeface="Lato" panose="020F0502020204030203" pitchFamily="34" charset="0"/>
+              </a:rPr>
+              <a:t>12</a:t>
+            </a:fld>
+            <a:endParaRPr lang="de-DE" sz="1600" dirty="0">
+              <a:latin typeface="Lato" panose="020F0502020204030203" pitchFamily="34" charset="0"/>
+              <a:ea typeface="Lato" panose="020F0502020204030203" pitchFamily="34" charset="0"/>
+              <a:cs typeface="Lato" panose="020F0502020204030203" pitchFamily="34" charset="0"/>
+            </a:endParaRPr>
+          </a:p>
+        </p:txBody>
+      </p:sp>
     </p:spTree>
     <p:extLst>
       <p:ext uri="{BB962C8B-B14F-4D97-AF65-F5344CB8AC3E}">
@@ -6498,6 +7226,58 @@
           </a:prstGeom>
         </p:spPr>
       </p:pic>
+      <p:sp>
+        <p:nvSpPr>
+          <p:cNvPr id="2" name="Textfeld 1">
+            <a:extLst>
+              <a:ext uri="{FF2B5EF4-FFF2-40B4-BE49-F238E27FC236}">
+                <a16:creationId xmlns:a16="http://schemas.microsoft.com/office/drawing/2014/main" id="{1D8ABECF-2211-0968-B3B3-824179B36A13}"/>
+              </a:ext>
+            </a:extLst>
+          </p:cNvPr>
+          <p:cNvSpPr txBox="1"/>
+          <p:nvPr/>
+        </p:nvSpPr>
+        <p:spPr>
+          <a:xfrm>
+            <a:off x="0" y="0"/>
+            <a:ext cx="2448272" cy="338554"/>
+          </a:xfrm>
+          <a:prstGeom prst="rect">
+            <a:avLst/>
+          </a:prstGeom>
+          <a:noFill/>
+        </p:spPr>
+        <p:txBody>
+          <a:bodyPr wrap="square" rtlCol="0">
+            <a:spAutoFit/>
+          </a:bodyPr>
+          <a:lstStyle/>
+          <a:p>
+            <a:r>
+              <a:rPr lang="de-DE" sz="1600" dirty="0">
+                <a:latin typeface="Lato" panose="020F0502020204030203" pitchFamily="34" charset="0"/>
+                <a:ea typeface="Lato" panose="020F0502020204030203" pitchFamily="34" charset="0"/>
+                <a:cs typeface="Lato" panose="020F0502020204030203" pitchFamily="34" charset="0"/>
+              </a:rPr>
+              <a:t>Durchgang </a:t>
+            </a:r>
+            <a:fld id="{F6753D12-211B-4EF5-AA64-00216E01E36B}" type="slidenum">
+              <a:rPr lang="de-DE" sz="1600" smtClean="0">
+                <a:latin typeface="Lato" panose="020F0502020204030203" pitchFamily="34" charset="0"/>
+                <a:ea typeface="Lato" panose="020F0502020204030203" pitchFamily="34" charset="0"/>
+                <a:cs typeface="Lato" panose="020F0502020204030203" pitchFamily="34" charset="0"/>
+              </a:rPr>
+              <a:t>13</a:t>
+            </a:fld>
+            <a:endParaRPr lang="de-DE" sz="1600" dirty="0">
+              <a:latin typeface="Lato" panose="020F0502020204030203" pitchFamily="34" charset="0"/>
+              <a:ea typeface="Lato" panose="020F0502020204030203" pitchFamily="34" charset="0"/>
+              <a:cs typeface="Lato" panose="020F0502020204030203" pitchFamily="34" charset="0"/>
+            </a:endParaRPr>
+          </a:p>
+        </p:txBody>
+      </p:sp>
     </p:spTree>
     <p:extLst>
       <p:ext uri="{BB962C8B-B14F-4D97-AF65-F5344CB8AC3E}">
@@ -6561,6 +7341,58 @@
           </a:prstGeom>
         </p:spPr>
       </p:pic>
+      <p:sp>
+        <p:nvSpPr>
+          <p:cNvPr id="2" name="Textfeld 1">
+            <a:extLst>
+              <a:ext uri="{FF2B5EF4-FFF2-40B4-BE49-F238E27FC236}">
+                <a16:creationId xmlns:a16="http://schemas.microsoft.com/office/drawing/2014/main" id="{C81E5239-1157-4BA6-04F0-AB9E97B78D6F}"/>
+              </a:ext>
+            </a:extLst>
+          </p:cNvPr>
+          <p:cNvSpPr txBox="1"/>
+          <p:nvPr/>
+        </p:nvSpPr>
+        <p:spPr>
+          <a:xfrm>
+            <a:off x="0" y="0"/>
+            <a:ext cx="2448272" cy="338554"/>
+          </a:xfrm>
+          <a:prstGeom prst="rect">
+            <a:avLst/>
+          </a:prstGeom>
+          <a:noFill/>
+        </p:spPr>
+        <p:txBody>
+          <a:bodyPr wrap="square" rtlCol="0">
+            <a:spAutoFit/>
+          </a:bodyPr>
+          <a:lstStyle/>
+          <a:p>
+            <a:r>
+              <a:rPr lang="de-DE" sz="1600" dirty="0">
+                <a:latin typeface="Lato" panose="020F0502020204030203" pitchFamily="34" charset="0"/>
+                <a:ea typeface="Lato" panose="020F0502020204030203" pitchFamily="34" charset="0"/>
+                <a:cs typeface="Lato" panose="020F0502020204030203" pitchFamily="34" charset="0"/>
+              </a:rPr>
+              <a:t>Durchgang </a:t>
+            </a:r>
+            <a:fld id="{F6753D12-211B-4EF5-AA64-00216E01E36B}" type="slidenum">
+              <a:rPr lang="de-DE" sz="1600" smtClean="0">
+                <a:latin typeface="Lato" panose="020F0502020204030203" pitchFamily="34" charset="0"/>
+                <a:ea typeface="Lato" panose="020F0502020204030203" pitchFamily="34" charset="0"/>
+                <a:cs typeface="Lato" panose="020F0502020204030203" pitchFamily="34" charset="0"/>
+              </a:rPr>
+              <a:t>14</a:t>
+            </a:fld>
+            <a:endParaRPr lang="de-DE" sz="1600" dirty="0">
+              <a:latin typeface="Lato" panose="020F0502020204030203" pitchFamily="34" charset="0"/>
+              <a:ea typeface="Lato" panose="020F0502020204030203" pitchFamily="34" charset="0"/>
+              <a:cs typeface="Lato" panose="020F0502020204030203" pitchFamily="34" charset="0"/>
+            </a:endParaRPr>
+          </a:p>
+        </p:txBody>
+      </p:sp>
     </p:spTree>
     <p:extLst>
       <p:ext uri="{BB962C8B-B14F-4D97-AF65-F5344CB8AC3E}">
@@ -6624,6 +7456,58 @@
           </a:prstGeom>
         </p:spPr>
       </p:pic>
+      <p:sp>
+        <p:nvSpPr>
+          <p:cNvPr id="2" name="Textfeld 1">
+            <a:extLst>
+              <a:ext uri="{FF2B5EF4-FFF2-40B4-BE49-F238E27FC236}">
+                <a16:creationId xmlns:a16="http://schemas.microsoft.com/office/drawing/2014/main" id="{E188D8FD-A35E-F162-FA56-A6E6D1D9C739}"/>
+              </a:ext>
+            </a:extLst>
+          </p:cNvPr>
+          <p:cNvSpPr txBox="1"/>
+          <p:nvPr/>
+        </p:nvSpPr>
+        <p:spPr>
+          <a:xfrm>
+            <a:off x="0" y="0"/>
+            <a:ext cx="2448272" cy="338554"/>
+          </a:xfrm>
+          <a:prstGeom prst="rect">
+            <a:avLst/>
+          </a:prstGeom>
+          <a:noFill/>
+        </p:spPr>
+        <p:txBody>
+          <a:bodyPr wrap="square" rtlCol="0">
+            <a:spAutoFit/>
+          </a:bodyPr>
+          <a:lstStyle/>
+          <a:p>
+            <a:r>
+              <a:rPr lang="de-DE" sz="1600" dirty="0">
+                <a:latin typeface="Lato" panose="020F0502020204030203" pitchFamily="34" charset="0"/>
+                <a:ea typeface="Lato" panose="020F0502020204030203" pitchFamily="34" charset="0"/>
+                <a:cs typeface="Lato" panose="020F0502020204030203" pitchFamily="34" charset="0"/>
+              </a:rPr>
+              <a:t>Durchgang </a:t>
+            </a:r>
+            <a:fld id="{F6753D12-211B-4EF5-AA64-00216E01E36B}" type="slidenum">
+              <a:rPr lang="de-DE" sz="1600" smtClean="0">
+                <a:latin typeface="Lato" panose="020F0502020204030203" pitchFamily="34" charset="0"/>
+                <a:ea typeface="Lato" panose="020F0502020204030203" pitchFamily="34" charset="0"/>
+                <a:cs typeface="Lato" panose="020F0502020204030203" pitchFamily="34" charset="0"/>
+              </a:rPr>
+              <a:t>15</a:t>
+            </a:fld>
+            <a:endParaRPr lang="de-DE" sz="1600" dirty="0">
+              <a:latin typeface="Lato" panose="020F0502020204030203" pitchFamily="34" charset="0"/>
+              <a:ea typeface="Lato" panose="020F0502020204030203" pitchFamily="34" charset="0"/>
+              <a:cs typeface="Lato" panose="020F0502020204030203" pitchFamily="34" charset="0"/>
+            </a:endParaRPr>
+          </a:p>
+        </p:txBody>
+      </p:sp>
     </p:spTree>
     <p:extLst>
       <p:ext uri="{BB962C8B-B14F-4D97-AF65-F5344CB8AC3E}">
@@ -6750,6 +7634,58 @@
           </a:prstGeom>
         </p:spPr>
       </p:pic>
+      <p:sp>
+        <p:nvSpPr>
+          <p:cNvPr id="2" name="Textfeld 1">
+            <a:extLst>
+              <a:ext uri="{FF2B5EF4-FFF2-40B4-BE49-F238E27FC236}">
+                <a16:creationId xmlns:a16="http://schemas.microsoft.com/office/drawing/2014/main" id="{0A703D22-309F-DB6D-641A-6586939F9FEC}"/>
+              </a:ext>
+            </a:extLst>
+          </p:cNvPr>
+          <p:cNvSpPr txBox="1"/>
+          <p:nvPr/>
+        </p:nvSpPr>
+        <p:spPr>
+          <a:xfrm>
+            <a:off x="0" y="0"/>
+            <a:ext cx="2448272" cy="338554"/>
+          </a:xfrm>
+          <a:prstGeom prst="rect">
+            <a:avLst/>
+          </a:prstGeom>
+          <a:noFill/>
+        </p:spPr>
+        <p:txBody>
+          <a:bodyPr wrap="square" rtlCol="0">
+            <a:spAutoFit/>
+          </a:bodyPr>
+          <a:lstStyle/>
+          <a:p>
+            <a:r>
+              <a:rPr lang="de-DE" sz="1600" dirty="0">
+                <a:latin typeface="Lato" panose="020F0502020204030203" pitchFamily="34" charset="0"/>
+                <a:ea typeface="Lato" panose="020F0502020204030203" pitchFamily="34" charset="0"/>
+                <a:cs typeface="Lato" panose="020F0502020204030203" pitchFamily="34" charset="0"/>
+              </a:rPr>
+              <a:t>Durchgang </a:t>
+            </a:r>
+            <a:fld id="{F6753D12-211B-4EF5-AA64-00216E01E36B}" type="slidenum">
+              <a:rPr lang="de-DE" sz="1600" smtClean="0">
+                <a:latin typeface="Lato" panose="020F0502020204030203" pitchFamily="34" charset="0"/>
+                <a:ea typeface="Lato" panose="020F0502020204030203" pitchFamily="34" charset="0"/>
+                <a:cs typeface="Lato" panose="020F0502020204030203" pitchFamily="34" charset="0"/>
+              </a:rPr>
+              <a:t>17</a:t>
+            </a:fld>
+            <a:endParaRPr lang="de-DE" sz="1600" dirty="0">
+              <a:latin typeface="Lato" panose="020F0502020204030203" pitchFamily="34" charset="0"/>
+              <a:ea typeface="Lato" panose="020F0502020204030203" pitchFamily="34" charset="0"/>
+              <a:cs typeface="Lato" panose="020F0502020204030203" pitchFamily="34" charset="0"/>
+            </a:endParaRPr>
+          </a:p>
+        </p:txBody>
+      </p:sp>
     </p:spTree>
     <p:extLst>
       <p:ext uri="{BB962C8B-B14F-4D97-AF65-F5344CB8AC3E}">
@@ -6813,6 +7749,58 @@
           </a:prstGeom>
         </p:spPr>
       </p:pic>
+      <p:sp>
+        <p:nvSpPr>
+          <p:cNvPr id="2" name="Textfeld 1">
+            <a:extLst>
+              <a:ext uri="{FF2B5EF4-FFF2-40B4-BE49-F238E27FC236}">
+                <a16:creationId xmlns:a16="http://schemas.microsoft.com/office/drawing/2014/main" id="{51747E33-3420-3164-C3DF-58914D4B1161}"/>
+              </a:ext>
+            </a:extLst>
+          </p:cNvPr>
+          <p:cNvSpPr txBox="1"/>
+          <p:nvPr/>
+        </p:nvSpPr>
+        <p:spPr>
+          <a:xfrm>
+            <a:off x="0" y="0"/>
+            <a:ext cx="2448272" cy="338554"/>
+          </a:xfrm>
+          <a:prstGeom prst="rect">
+            <a:avLst/>
+          </a:prstGeom>
+          <a:noFill/>
+        </p:spPr>
+        <p:txBody>
+          <a:bodyPr wrap="square" rtlCol="0">
+            <a:spAutoFit/>
+          </a:bodyPr>
+          <a:lstStyle/>
+          <a:p>
+            <a:r>
+              <a:rPr lang="de-DE" sz="1600" dirty="0">
+                <a:latin typeface="Lato" panose="020F0502020204030203" pitchFamily="34" charset="0"/>
+                <a:ea typeface="Lato" panose="020F0502020204030203" pitchFamily="34" charset="0"/>
+                <a:cs typeface="Lato" panose="020F0502020204030203" pitchFamily="34" charset="0"/>
+              </a:rPr>
+              <a:t>Durchgang </a:t>
+            </a:r>
+            <a:fld id="{F6753D12-211B-4EF5-AA64-00216E01E36B}" type="slidenum">
+              <a:rPr lang="de-DE" sz="1600" smtClean="0">
+                <a:latin typeface="Lato" panose="020F0502020204030203" pitchFamily="34" charset="0"/>
+                <a:ea typeface="Lato" panose="020F0502020204030203" pitchFamily="34" charset="0"/>
+                <a:cs typeface="Lato" panose="020F0502020204030203" pitchFamily="34" charset="0"/>
+              </a:rPr>
+              <a:t>18</a:t>
+            </a:fld>
+            <a:endParaRPr lang="de-DE" sz="1600" dirty="0">
+              <a:latin typeface="Lato" panose="020F0502020204030203" pitchFamily="34" charset="0"/>
+              <a:ea typeface="Lato" panose="020F0502020204030203" pitchFamily="34" charset="0"/>
+              <a:cs typeface="Lato" panose="020F0502020204030203" pitchFamily="34" charset="0"/>
+            </a:endParaRPr>
+          </a:p>
+        </p:txBody>
+      </p:sp>
     </p:spTree>
     <p:extLst>
       <p:ext uri="{BB962C8B-B14F-4D97-AF65-F5344CB8AC3E}">
@@ -6876,6 +7864,58 @@
           </a:prstGeom>
         </p:spPr>
       </p:pic>
+      <p:sp>
+        <p:nvSpPr>
+          <p:cNvPr id="2" name="Textfeld 1">
+            <a:extLst>
+              <a:ext uri="{FF2B5EF4-FFF2-40B4-BE49-F238E27FC236}">
+                <a16:creationId xmlns:a16="http://schemas.microsoft.com/office/drawing/2014/main" id="{C123B933-24FE-E94D-DFF4-2C57D56157A3}"/>
+              </a:ext>
+            </a:extLst>
+          </p:cNvPr>
+          <p:cNvSpPr txBox="1"/>
+          <p:nvPr/>
+        </p:nvSpPr>
+        <p:spPr>
+          <a:xfrm>
+            <a:off x="0" y="0"/>
+            <a:ext cx="2448272" cy="338554"/>
+          </a:xfrm>
+          <a:prstGeom prst="rect">
+            <a:avLst/>
+          </a:prstGeom>
+          <a:noFill/>
+        </p:spPr>
+        <p:txBody>
+          <a:bodyPr wrap="square" rtlCol="0">
+            <a:spAutoFit/>
+          </a:bodyPr>
+          <a:lstStyle/>
+          <a:p>
+            <a:r>
+              <a:rPr lang="de-DE" sz="1600" dirty="0">
+                <a:latin typeface="Lato" panose="020F0502020204030203" pitchFamily="34" charset="0"/>
+                <a:ea typeface="Lato" panose="020F0502020204030203" pitchFamily="34" charset="0"/>
+                <a:cs typeface="Lato" panose="020F0502020204030203" pitchFamily="34" charset="0"/>
+              </a:rPr>
+              <a:t>Durchgang </a:t>
+            </a:r>
+            <a:fld id="{F6753D12-211B-4EF5-AA64-00216E01E36B}" type="slidenum">
+              <a:rPr lang="de-DE" sz="1600" smtClean="0">
+                <a:latin typeface="Lato" panose="020F0502020204030203" pitchFamily="34" charset="0"/>
+                <a:ea typeface="Lato" panose="020F0502020204030203" pitchFamily="34" charset="0"/>
+                <a:cs typeface="Lato" panose="020F0502020204030203" pitchFamily="34" charset="0"/>
+              </a:rPr>
+              <a:t>19</a:t>
+            </a:fld>
+            <a:endParaRPr lang="de-DE" sz="1600" dirty="0">
+              <a:latin typeface="Lato" panose="020F0502020204030203" pitchFamily="34" charset="0"/>
+              <a:ea typeface="Lato" panose="020F0502020204030203" pitchFamily="34" charset="0"/>
+              <a:cs typeface="Lato" panose="020F0502020204030203" pitchFamily="34" charset="0"/>
+            </a:endParaRPr>
+          </a:p>
+        </p:txBody>
+      </p:sp>
     </p:spTree>
     <p:extLst>
       <p:ext uri="{BB962C8B-B14F-4D97-AF65-F5344CB8AC3E}">
@@ -6939,6 +7979,58 @@
           </a:prstGeom>
         </p:spPr>
       </p:pic>
+      <p:sp>
+        <p:nvSpPr>
+          <p:cNvPr id="2" name="Textfeld 1">
+            <a:extLst>
+              <a:ext uri="{FF2B5EF4-FFF2-40B4-BE49-F238E27FC236}">
+                <a16:creationId xmlns:a16="http://schemas.microsoft.com/office/drawing/2014/main" id="{5C60B34D-790A-FEAD-D7D4-41E5E7FDD170}"/>
+              </a:ext>
+            </a:extLst>
+          </p:cNvPr>
+          <p:cNvSpPr txBox="1"/>
+          <p:nvPr/>
+        </p:nvSpPr>
+        <p:spPr>
+          <a:xfrm>
+            <a:off x="0" y="0"/>
+            <a:ext cx="2448272" cy="338554"/>
+          </a:xfrm>
+          <a:prstGeom prst="rect">
+            <a:avLst/>
+          </a:prstGeom>
+          <a:noFill/>
+        </p:spPr>
+        <p:txBody>
+          <a:bodyPr wrap="square" rtlCol="0">
+            <a:spAutoFit/>
+          </a:bodyPr>
+          <a:lstStyle/>
+          <a:p>
+            <a:r>
+              <a:rPr lang="de-DE" sz="1600" dirty="0">
+                <a:latin typeface="Lato" panose="020F0502020204030203" pitchFamily="34" charset="0"/>
+                <a:ea typeface="Lato" panose="020F0502020204030203" pitchFamily="34" charset="0"/>
+                <a:cs typeface="Lato" panose="020F0502020204030203" pitchFamily="34" charset="0"/>
+              </a:rPr>
+              <a:t>Durchgang </a:t>
+            </a:r>
+            <a:fld id="{F6753D12-211B-4EF5-AA64-00216E01E36B}" type="slidenum">
+              <a:rPr lang="de-DE" sz="1600" smtClean="0">
+                <a:latin typeface="Lato" panose="020F0502020204030203" pitchFamily="34" charset="0"/>
+                <a:ea typeface="Lato" panose="020F0502020204030203" pitchFamily="34" charset="0"/>
+                <a:cs typeface="Lato" panose="020F0502020204030203" pitchFamily="34" charset="0"/>
+              </a:rPr>
+              <a:t>2</a:t>
+            </a:fld>
+            <a:endParaRPr lang="de-DE" sz="1600" dirty="0">
+              <a:latin typeface="Lato" panose="020F0502020204030203" pitchFamily="34" charset="0"/>
+              <a:ea typeface="Lato" panose="020F0502020204030203" pitchFamily="34" charset="0"/>
+              <a:cs typeface="Lato" panose="020F0502020204030203" pitchFamily="34" charset="0"/>
+            </a:endParaRPr>
+          </a:p>
+        </p:txBody>
+      </p:sp>
     </p:spTree>
     <p:extLst>
       <p:ext uri="{BB962C8B-B14F-4D97-AF65-F5344CB8AC3E}">
@@ -7002,6 +8094,58 @@
           </a:prstGeom>
         </p:spPr>
       </p:pic>
+      <p:sp>
+        <p:nvSpPr>
+          <p:cNvPr id="2" name="Textfeld 1">
+            <a:extLst>
+              <a:ext uri="{FF2B5EF4-FFF2-40B4-BE49-F238E27FC236}">
+                <a16:creationId xmlns:a16="http://schemas.microsoft.com/office/drawing/2014/main" id="{599BB392-520B-E1B8-EF76-8C8B822F65FA}"/>
+              </a:ext>
+            </a:extLst>
+          </p:cNvPr>
+          <p:cNvSpPr txBox="1"/>
+          <p:nvPr/>
+        </p:nvSpPr>
+        <p:spPr>
+          <a:xfrm>
+            <a:off x="0" y="0"/>
+            <a:ext cx="2448272" cy="338554"/>
+          </a:xfrm>
+          <a:prstGeom prst="rect">
+            <a:avLst/>
+          </a:prstGeom>
+          <a:noFill/>
+        </p:spPr>
+        <p:txBody>
+          <a:bodyPr wrap="square" rtlCol="0">
+            <a:spAutoFit/>
+          </a:bodyPr>
+          <a:lstStyle/>
+          <a:p>
+            <a:r>
+              <a:rPr lang="de-DE" sz="1600" dirty="0">
+                <a:latin typeface="Lato" panose="020F0502020204030203" pitchFamily="34" charset="0"/>
+                <a:ea typeface="Lato" panose="020F0502020204030203" pitchFamily="34" charset="0"/>
+                <a:cs typeface="Lato" panose="020F0502020204030203" pitchFamily="34" charset="0"/>
+              </a:rPr>
+              <a:t>Durchgang </a:t>
+            </a:r>
+            <a:fld id="{F6753D12-211B-4EF5-AA64-00216E01E36B}" type="slidenum">
+              <a:rPr lang="de-DE" sz="1600" smtClean="0">
+                <a:latin typeface="Lato" panose="020F0502020204030203" pitchFamily="34" charset="0"/>
+                <a:ea typeface="Lato" panose="020F0502020204030203" pitchFamily="34" charset="0"/>
+                <a:cs typeface="Lato" panose="020F0502020204030203" pitchFamily="34" charset="0"/>
+              </a:rPr>
+              <a:t>20</a:t>
+            </a:fld>
+            <a:endParaRPr lang="de-DE" sz="1600" dirty="0">
+              <a:latin typeface="Lato" panose="020F0502020204030203" pitchFamily="34" charset="0"/>
+              <a:ea typeface="Lato" panose="020F0502020204030203" pitchFamily="34" charset="0"/>
+              <a:cs typeface="Lato" panose="020F0502020204030203" pitchFamily="34" charset="0"/>
+            </a:endParaRPr>
+          </a:p>
+        </p:txBody>
+      </p:sp>
     </p:spTree>
     <p:extLst>
       <p:ext uri="{BB962C8B-B14F-4D97-AF65-F5344CB8AC3E}">
@@ -7065,6 +8209,58 @@
           </a:prstGeom>
         </p:spPr>
       </p:pic>
+      <p:sp>
+        <p:nvSpPr>
+          <p:cNvPr id="2" name="Textfeld 1">
+            <a:extLst>
+              <a:ext uri="{FF2B5EF4-FFF2-40B4-BE49-F238E27FC236}">
+                <a16:creationId xmlns:a16="http://schemas.microsoft.com/office/drawing/2014/main" id="{37D9A45E-67FC-72FF-650F-7232A4E4A09F}"/>
+              </a:ext>
+            </a:extLst>
+          </p:cNvPr>
+          <p:cNvSpPr txBox="1"/>
+          <p:nvPr/>
+        </p:nvSpPr>
+        <p:spPr>
+          <a:xfrm>
+            <a:off x="0" y="0"/>
+            <a:ext cx="2448272" cy="338554"/>
+          </a:xfrm>
+          <a:prstGeom prst="rect">
+            <a:avLst/>
+          </a:prstGeom>
+          <a:noFill/>
+        </p:spPr>
+        <p:txBody>
+          <a:bodyPr wrap="square" rtlCol="0">
+            <a:spAutoFit/>
+          </a:bodyPr>
+          <a:lstStyle/>
+          <a:p>
+            <a:r>
+              <a:rPr lang="de-DE" sz="1600" dirty="0">
+                <a:latin typeface="Lato" panose="020F0502020204030203" pitchFamily="34" charset="0"/>
+                <a:ea typeface="Lato" panose="020F0502020204030203" pitchFamily="34" charset="0"/>
+                <a:cs typeface="Lato" panose="020F0502020204030203" pitchFamily="34" charset="0"/>
+              </a:rPr>
+              <a:t>Durchgang </a:t>
+            </a:r>
+            <a:fld id="{F6753D12-211B-4EF5-AA64-00216E01E36B}" type="slidenum">
+              <a:rPr lang="de-DE" sz="1600" smtClean="0">
+                <a:latin typeface="Lato" panose="020F0502020204030203" pitchFamily="34" charset="0"/>
+                <a:ea typeface="Lato" panose="020F0502020204030203" pitchFamily="34" charset="0"/>
+                <a:cs typeface="Lato" panose="020F0502020204030203" pitchFamily="34" charset="0"/>
+              </a:rPr>
+              <a:t>21</a:t>
+            </a:fld>
+            <a:endParaRPr lang="de-DE" sz="1600" dirty="0">
+              <a:latin typeface="Lato" panose="020F0502020204030203" pitchFamily="34" charset="0"/>
+              <a:ea typeface="Lato" panose="020F0502020204030203" pitchFamily="34" charset="0"/>
+              <a:cs typeface="Lato" panose="020F0502020204030203" pitchFamily="34" charset="0"/>
+            </a:endParaRPr>
+          </a:p>
+        </p:txBody>
+      </p:sp>
     </p:spTree>
     <p:extLst>
       <p:ext uri="{BB962C8B-B14F-4D97-AF65-F5344CB8AC3E}">
@@ -7128,6 +8324,58 @@
           </a:prstGeom>
         </p:spPr>
       </p:pic>
+      <p:sp>
+        <p:nvSpPr>
+          <p:cNvPr id="2" name="Textfeld 1">
+            <a:extLst>
+              <a:ext uri="{FF2B5EF4-FFF2-40B4-BE49-F238E27FC236}">
+                <a16:creationId xmlns:a16="http://schemas.microsoft.com/office/drawing/2014/main" id="{501922AD-6803-47B9-337E-3A0D9A87A4F5}"/>
+              </a:ext>
+            </a:extLst>
+          </p:cNvPr>
+          <p:cNvSpPr txBox="1"/>
+          <p:nvPr/>
+        </p:nvSpPr>
+        <p:spPr>
+          <a:xfrm>
+            <a:off x="0" y="0"/>
+            <a:ext cx="2448272" cy="338554"/>
+          </a:xfrm>
+          <a:prstGeom prst="rect">
+            <a:avLst/>
+          </a:prstGeom>
+          <a:noFill/>
+        </p:spPr>
+        <p:txBody>
+          <a:bodyPr wrap="square" rtlCol="0">
+            <a:spAutoFit/>
+          </a:bodyPr>
+          <a:lstStyle/>
+          <a:p>
+            <a:r>
+              <a:rPr lang="de-DE" sz="1600" dirty="0">
+                <a:latin typeface="Lato" panose="020F0502020204030203" pitchFamily="34" charset="0"/>
+                <a:ea typeface="Lato" panose="020F0502020204030203" pitchFamily="34" charset="0"/>
+                <a:cs typeface="Lato" panose="020F0502020204030203" pitchFamily="34" charset="0"/>
+              </a:rPr>
+              <a:t>Durchgang </a:t>
+            </a:r>
+            <a:fld id="{F6753D12-211B-4EF5-AA64-00216E01E36B}" type="slidenum">
+              <a:rPr lang="de-DE" sz="1600" smtClean="0">
+                <a:latin typeface="Lato" panose="020F0502020204030203" pitchFamily="34" charset="0"/>
+                <a:ea typeface="Lato" panose="020F0502020204030203" pitchFamily="34" charset="0"/>
+                <a:cs typeface="Lato" panose="020F0502020204030203" pitchFamily="34" charset="0"/>
+              </a:rPr>
+              <a:t>22</a:t>
+            </a:fld>
+            <a:endParaRPr lang="de-DE" sz="1600" dirty="0">
+              <a:latin typeface="Lato" panose="020F0502020204030203" pitchFamily="34" charset="0"/>
+              <a:ea typeface="Lato" panose="020F0502020204030203" pitchFamily="34" charset="0"/>
+              <a:cs typeface="Lato" panose="020F0502020204030203" pitchFamily="34" charset="0"/>
+            </a:endParaRPr>
+          </a:p>
+        </p:txBody>
+      </p:sp>
     </p:spTree>
     <p:extLst>
       <p:ext uri="{BB962C8B-B14F-4D97-AF65-F5344CB8AC3E}">
@@ -7191,6 +8439,58 @@
           </a:prstGeom>
         </p:spPr>
       </p:pic>
+      <p:sp>
+        <p:nvSpPr>
+          <p:cNvPr id="2" name="Textfeld 1">
+            <a:extLst>
+              <a:ext uri="{FF2B5EF4-FFF2-40B4-BE49-F238E27FC236}">
+                <a16:creationId xmlns:a16="http://schemas.microsoft.com/office/drawing/2014/main" id="{9A6853AF-EB41-37EB-C45D-3681CA0B1578}"/>
+              </a:ext>
+            </a:extLst>
+          </p:cNvPr>
+          <p:cNvSpPr txBox="1"/>
+          <p:nvPr/>
+        </p:nvSpPr>
+        <p:spPr>
+          <a:xfrm>
+            <a:off x="0" y="0"/>
+            <a:ext cx="2448272" cy="338554"/>
+          </a:xfrm>
+          <a:prstGeom prst="rect">
+            <a:avLst/>
+          </a:prstGeom>
+          <a:noFill/>
+        </p:spPr>
+        <p:txBody>
+          <a:bodyPr wrap="square" rtlCol="0">
+            <a:spAutoFit/>
+          </a:bodyPr>
+          <a:lstStyle/>
+          <a:p>
+            <a:r>
+              <a:rPr lang="de-DE" sz="1600" dirty="0">
+                <a:latin typeface="Lato" panose="020F0502020204030203" pitchFamily="34" charset="0"/>
+                <a:ea typeface="Lato" panose="020F0502020204030203" pitchFamily="34" charset="0"/>
+                <a:cs typeface="Lato" panose="020F0502020204030203" pitchFamily="34" charset="0"/>
+              </a:rPr>
+              <a:t>Durchgang </a:t>
+            </a:r>
+            <a:fld id="{F6753D12-211B-4EF5-AA64-00216E01E36B}" type="slidenum">
+              <a:rPr lang="de-DE" sz="1600" smtClean="0">
+                <a:latin typeface="Lato" panose="020F0502020204030203" pitchFamily="34" charset="0"/>
+                <a:ea typeface="Lato" panose="020F0502020204030203" pitchFamily="34" charset="0"/>
+                <a:cs typeface="Lato" panose="020F0502020204030203" pitchFamily="34" charset="0"/>
+              </a:rPr>
+              <a:t>23</a:t>
+            </a:fld>
+            <a:endParaRPr lang="de-DE" sz="1600" dirty="0">
+              <a:latin typeface="Lato" panose="020F0502020204030203" pitchFamily="34" charset="0"/>
+              <a:ea typeface="Lato" panose="020F0502020204030203" pitchFamily="34" charset="0"/>
+              <a:cs typeface="Lato" panose="020F0502020204030203" pitchFamily="34" charset="0"/>
+            </a:endParaRPr>
+          </a:p>
+        </p:txBody>
+      </p:sp>
     </p:spTree>
     <p:extLst>
       <p:ext uri="{BB962C8B-B14F-4D97-AF65-F5344CB8AC3E}">
@@ -7254,6 +8554,58 @@
           </a:prstGeom>
         </p:spPr>
       </p:pic>
+      <p:sp>
+        <p:nvSpPr>
+          <p:cNvPr id="2" name="Textfeld 1">
+            <a:extLst>
+              <a:ext uri="{FF2B5EF4-FFF2-40B4-BE49-F238E27FC236}">
+                <a16:creationId xmlns:a16="http://schemas.microsoft.com/office/drawing/2014/main" id="{73DB2C7C-8FBF-720C-DA5E-DC97ED0AB08E}"/>
+              </a:ext>
+            </a:extLst>
+          </p:cNvPr>
+          <p:cNvSpPr txBox="1"/>
+          <p:nvPr/>
+        </p:nvSpPr>
+        <p:spPr>
+          <a:xfrm>
+            <a:off x="0" y="0"/>
+            <a:ext cx="2448272" cy="338554"/>
+          </a:xfrm>
+          <a:prstGeom prst="rect">
+            <a:avLst/>
+          </a:prstGeom>
+          <a:noFill/>
+        </p:spPr>
+        <p:txBody>
+          <a:bodyPr wrap="square" rtlCol="0">
+            <a:spAutoFit/>
+          </a:bodyPr>
+          <a:lstStyle/>
+          <a:p>
+            <a:r>
+              <a:rPr lang="de-DE" sz="1600" dirty="0">
+                <a:latin typeface="Lato" panose="020F0502020204030203" pitchFamily="34" charset="0"/>
+                <a:ea typeface="Lato" panose="020F0502020204030203" pitchFamily="34" charset="0"/>
+                <a:cs typeface="Lato" panose="020F0502020204030203" pitchFamily="34" charset="0"/>
+              </a:rPr>
+              <a:t>Durchgang </a:t>
+            </a:r>
+            <a:fld id="{F6753D12-211B-4EF5-AA64-00216E01E36B}" type="slidenum">
+              <a:rPr lang="de-DE" sz="1600" smtClean="0">
+                <a:latin typeface="Lato" panose="020F0502020204030203" pitchFamily="34" charset="0"/>
+                <a:ea typeface="Lato" panose="020F0502020204030203" pitchFamily="34" charset="0"/>
+                <a:cs typeface="Lato" panose="020F0502020204030203" pitchFamily="34" charset="0"/>
+              </a:rPr>
+              <a:t>24</a:t>
+            </a:fld>
+            <a:endParaRPr lang="de-DE" sz="1600" dirty="0">
+              <a:latin typeface="Lato" panose="020F0502020204030203" pitchFamily="34" charset="0"/>
+              <a:ea typeface="Lato" panose="020F0502020204030203" pitchFamily="34" charset="0"/>
+              <a:cs typeface="Lato" panose="020F0502020204030203" pitchFamily="34" charset="0"/>
+            </a:endParaRPr>
+          </a:p>
+        </p:txBody>
+      </p:sp>
     </p:spTree>
     <p:extLst>
       <p:ext uri="{BB962C8B-B14F-4D97-AF65-F5344CB8AC3E}">
@@ -7317,6 +8669,58 @@
           </a:prstGeom>
         </p:spPr>
       </p:pic>
+      <p:sp>
+        <p:nvSpPr>
+          <p:cNvPr id="2" name="Textfeld 1">
+            <a:extLst>
+              <a:ext uri="{FF2B5EF4-FFF2-40B4-BE49-F238E27FC236}">
+                <a16:creationId xmlns:a16="http://schemas.microsoft.com/office/drawing/2014/main" id="{3E8199AE-86D6-25D6-9CF4-24D647F86FED}"/>
+              </a:ext>
+            </a:extLst>
+          </p:cNvPr>
+          <p:cNvSpPr txBox="1"/>
+          <p:nvPr/>
+        </p:nvSpPr>
+        <p:spPr>
+          <a:xfrm>
+            <a:off x="0" y="0"/>
+            <a:ext cx="2448272" cy="338554"/>
+          </a:xfrm>
+          <a:prstGeom prst="rect">
+            <a:avLst/>
+          </a:prstGeom>
+          <a:noFill/>
+        </p:spPr>
+        <p:txBody>
+          <a:bodyPr wrap="square" rtlCol="0">
+            <a:spAutoFit/>
+          </a:bodyPr>
+          <a:lstStyle/>
+          <a:p>
+            <a:r>
+              <a:rPr lang="de-DE" sz="1600" dirty="0">
+                <a:latin typeface="Lato" panose="020F0502020204030203" pitchFamily="34" charset="0"/>
+                <a:ea typeface="Lato" panose="020F0502020204030203" pitchFamily="34" charset="0"/>
+                <a:cs typeface="Lato" panose="020F0502020204030203" pitchFamily="34" charset="0"/>
+              </a:rPr>
+              <a:t>Durchgang </a:t>
+            </a:r>
+            <a:fld id="{F6753D12-211B-4EF5-AA64-00216E01E36B}" type="slidenum">
+              <a:rPr lang="de-DE" sz="1600" smtClean="0">
+                <a:latin typeface="Lato" panose="020F0502020204030203" pitchFamily="34" charset="0"/>
+                <a:ea typeface="Lato" panose="020F0502020204030203" pitchFamily="34" charset="0"/>
+                <a:cs typeface="Lato" panose="020F0502020204030203" pitchFamily="34" charset="0"/>
+              </a:rPr>
+              <a:t>25</a:t>
+            </a:fld>
+            <a:endParaRPr lang="de-DE" sz="1600" dirty="0">
+              <a:latin typeface="Lato" panose="020F0502020204030203" pitchFamily="34" charset="0"/>
+              <a:ea typeface="Lato" panose="020F0502020204030203" pitchFamily="34" charset="0"/>
+              <a:cs typeface="Lato" panose="020F0502020204030203" pitchFamily="34" charset="0"/>
+            </a:endParaRPr>
+          </a:p>
+        </p:txBody>
+      </p:sp>
     </p:spTree>
     <p:extLst>
       <p:ext uri="{BB962C8B-B14F-4D97-AF65-F5344CB8AC3E}">
@@ -7380,6 +8784,58 @@
           </a:prstGeom>
         </p:spPr>
       </p:pic>
+      <p:sp>
+        <p:nvSpPr>
+          <p:cNvPr id="2" name="Textfeld 1">
+            <a:extLst>
+              <a:ext uri="{FF2B5EF4-FFF2-40B4-BE49-F238E27FC236}">
+                <a16:creationId xmlns:a16="http://schemas.microsoft.com/office/drawing/2014/main" id="{2A4D2E01-85C3-EDBC-9C3D-B213A6149C66}"/>
+              </a:ext>
+            </a:extLst>
+          </p:cNvPr>
+          <p:cNvSpPr txBox="1"/>
+          <p:nvPr/>
+        </p:nvSpPr>
+        <p:spPr>
+          <a:xfrm>
+            <a:off x="0" y="0"/>
+            <a:ext cx="2448272" cy="338554"/>
+          </a:xfrm>
+          <a:prstGeom prst="rect">
+            <a:avLst/>
+          </a:prstGeom>
+          <a:noFill/>
+        </p:spPr>
+        <p:txBody>
+          <a:bodyPr wrap="square" rtlCol="0">
+            <a:spAutoFit/>
+          </a:bodyPr>
+          <a:lstStyle/>
+          <a:p>
+            <a:r>
+              <a:rPr lang="de-DE" sz="1600" dirty="0">
+                <a:latin typeface="Lato" panose="020F0502020204030203" pitchFamily="34" charset="0"/>
+                <a:ea typeface="Lato" panose="020F0502020204030203" pitchFamily="34" charset="0"/>
+                <a:cs typeface="Lato" panose="020F0502020204030203" pitchFamily="34" charset="0"/>
+              </a:rPr>
+              <a:t>Durchgang </a:t>
+            </a:r>
+            <a:fld id="{F6753D12-211B-4EF5-AA64-00216E01E36B}" type="slidenum">
+              <a:rPr lang="de-DE" sz="1600" smtClean="0">
+                <a:latin typeface="Lato" panose="020F0502020204030203" pitchFamily="34" charset="0"/>
+                <a:ea typeface="Lato" panose="020F0502020204030203" pitchFamily="34" charset="0"/>
+                <a:cs typeface="Lato" panose="020F0502020204030203" pitchFamily="34" charset="0"/>
+              </a:rPr>
+              <a:t>26</a:t>
+            </a:fld>
+            <a:endParaRPr lang="de-DE" sz="1600" dirty="0">
+              <a:latin typeface="Lato" panose="020F0502020204030203" pitchFamily="34" charset="0"/>
+              <a:ea typeface="Lato" panose="020F0502020204030203" pitchFamily="34" charset="0"/>
+              <a:cs typeface="Lato" panose="020F0502020204030203" pitchFamily="34" charset="0"/>
+            </a:endParaRPr>
+          </a:p>
+        </p:txBody>
+      </p:sp>
     </p:spTree>
     <p:extLst>
       <p:ext uri="{BB962C8B-B14F-4D97-AF65-F5344CB8AC3E}">
@@ -7443,6 +8899,58 @@
           </a:prstGeom>
         </p:spPr>
       </p:pic>
+      <p:sp>
+        <p:nvSpPr>
+          <p:cNvPr id="2" name="Textfeld 1">
+            <a:extLst>
+              <a:ext uri="{FF2B5EF4-FFF2-40B4-BE49-F238E27FC236}">
+                <a16:creationId xmlns:a16="http://schemas.microsoft.com/office/drawing/2014/main" id="{AA1A652F-6BF7-F782-EE86-9E5612FD236E}"/>
+              </a:ext>
+            </a:extLst>
+          </p:cNvPr>
+          <p:cNvSpPr txBox="1"/>
+          <p:nvPr/>
+        </p:nvSpPr>
+        <p:spPr>
+          <a:xfrm>
+            <a:off x="0" y="0"/>
+            <a:ext cx="2448272" cy="338554"/>
+          </a:xfrm>
+          <a:prstGeom prst="rect">
+            <a:avLst/>
+          </a:prstGeom>
+          <a:noFill/>
+        </p:spPr>
+        <p:txBody>
+          <a:bodyPr wrap="square" rtlCol="0">
+            <a:spAutoFit/>
+          </a:bodyPr>
+          <a:lstStyle/>
+          <a:p>
+            <a:r>
+              <a:rPr lang="de-DE" sz="1600" dirty="0">
+                <a:latin typeface="Lato" panose="020F0502020204030203" pitchFamily="34" charset="0"/>
+                <a:ea typeface="Lato" panose="020F0502020204030203" pitchFamily="34" charset="0"/>
+                <a:cs typeface="Lato" panose="020F0502020204030203" pitchFamily="34" charset="0"/>
+              </a:rPr>
+              <a:t>Durchgang </a:t>
+            </a:r>
+            <a:fld id="{F6753D12-211B-4EF5-AA64-00216E01E36B}" type="slidenum">
+              <a:rPr lang="de-DE" sz="1600" smtClean="0">
+                <a:latin typeface="Lato" panose="020F0502020204030203" pitchFamily="34" charset="0"/>
+                <a:ea typeface="Lato" panose="020F0502020204030203" pitchFamily="34" charset="0"/>
+                <a:cs typeface="Lato" panose="020F0502020204030203" pitchFamily="34" charset="0"/>
+              </a:rPr>
+              <a:t>27</a:t>
+            </a:fld>
+            <a:endParaRPr lang="de-DE" sz="1600" dirty="0">
+              <a:latin typeface="Lato" panose="020F0502020204030203" pitchFamily="34" charset="0"/>
+              <a:ea typeface="Lato" panose="020F0502020204030203" pitchFamily="34" charset="0"/>
+              <a:cs typeface="Lato" panose="020F0502020204030203" pitchFamily="34" charset="0"/>
+            </a:endParaRPr>
+          </a:p>
+        </p:txBody>
+      </p:sp>
     </p:spTree>
     <p:extLst>
       <p:ext uri="{BB962C8B-B14F-4D97-AF65-F5344CB8AC3E}">
@@ -7506,6 +9014,58 @@
           </a:prstGeom>
         </p:spPr>
       </p:pic>
+      <p:sp>
+        <p:nvSpPr>
+          <p:cNvPr id="2" name="Textfeld 1">
+            <a:extLst>
+              <a:ext uri="{FF2B5EF4-FFF2-40B4-BE49-F238E27FC236}">
+                <a16:creationId xmlns:a16="http://schemas.microsoft.com/office/drawing/2014/main" id="{1B10FC15-F9CA-A816-50AD-073AF78B6105}"/>
+              </a:ext>
+            </a:extLst>
+          </p:cNvPr>
+          <p:cNvSpPr txBox="1"/>
+          <p:nvPr/>
+        </p:nvSpPr>
+        <p:spPr>
+          <a:xfrm>
+            <a:off x="0" y="0"/>
+            <a:ext cx="2448272" cy="338554"/>
+          </a:xfrm>
+          <a:prstGeom prst="rect">
+            <a:avLst/>
+          </a:prstGeom>
+          <a:noFill/>
+        </p:spPr>
+        <p:txBody>
+          <a:bodyPr wrap="square" rtlCol="0">
+            <a:spAutoFit/>
+          </a:bodyPr>
+          <a:lstStyle/>
+          <a:p>
+            <a:r>
+              <a:rPr lang="de-DE" sz="1600" dirty="0">
+                <a:latin typeface="Lato" panose="020F0502020204030203" pitchFamily="34" charset="0"/>
+                <a:ea typeface="Lato" panose="020F0502020204030203" pitchFamily="34" charset="0"/>
+                <a:cs typeface="Lato" panose="020F0502020204030203" pitchFamily="34" charset="0"/>
+              </a:rPr>
+              <a:t>Durchgang </a:t>
+            </a:r>
+            <a:fld id="{F6753D12-211B-4EF5-AA64-00216E01E36B}" type="slidenum">
+              <a:rPr lang="de-DE" sz="1600" smtClean="0">
+                <a:latin typeface="Lato" panose="020F0502020204030203" pitchFamily="34" charset="0"/>
+                <a:ea typeface="Lato" panose="020F0502020204030203" pitchFamily="34" charset="0"/>
+                <a:cs typeface="Lato" panose="020F0502020204030203" pitchFamily="34" charset="0"/>
+              </a:rPr>
+              <a:t>28</a:t>
+            </a:fld>
+            <a:endParaRPr lang="de-DE" sz="1600" dirty="0">
+              <a:latin typeface="Lato" panose="020F0502020204030203" pitchFamily="34" charset="0"/>
+              <a:ea typeface="Lato" panose="020F0502020204030203" pitchFamily="34" charset="0"/>
+              <a:cs typeface="Lato" panose="020F0502020204030203" pitchFamily="34" charset="0"/>
+            </a:endParaRPr>
+          </a:p>
+        </p:txBody>
+      </p:sp>
     </p:spTree>
     <p:extLst>
       <p:ext uri="{BB962C8B-B14F-4D97-AF65-F5344CB8AC3E}">
@@ -7569,6 +9129,58 @@
           </a:prstGeom>
         </p:spPr>
       </p:pic>
+      <p:sp>
+        <p:nvSpPr>
+          <p:cNvPr id="2" name="Textfeld 1">
+            <a:extLst>
+              <a:ext uri="{FF2B5EF4-FFF2-40B4-BE49-F238E27FC236}">
+                <a16:creationId xmlns:a16="http://schemas.microsoft.com/office/drawing/2014/main" id="{EFDED20D-F1D3-DEAF-F46B-BAD11C69F1DA}"/>
+              </a:ext>
+            </a:extLst>
+          </p:cNvPr>
+          <p:cNvSpPr txBox="1"/>
+          <p:nvPr/>
+        </p:nvSpPr>
+        <p:spPr>
+          <a:xfrm>
+            <a:off x="0" y="0"/>
+            <a:ext cx="2448272" cy="338554"/>
+          </a:xfrm>
+          <a:prstGeom prst="rect">
+            <a:avLst/>
+          </a:prstGeom>
+          <a:noFill/>
+        </p:spPr>
+        <p:txBody>
+          <a:bodyPr wrap="square" rtlCol="0">
+            <a:spAutoFit/>
+          </a:bodyPr>
+          <a:lstStyle/>
+          <a:p>
+            <a:r>
+              <a:rPr lang="de-DE" sz="1600" dirty="0">
+                <a:latin typeface="Lato" panose="020F0502020204030203" pitchFamily="34" charset="0"/>
+                <a:ea typeface="Lato" panose="020F0502020204030203" pitchFamily="34" charset="0"/>
+                <a:cs typeface="Lato" panose="020F0502020204030203" pitchFamily="34" charset="0"/>
+              </a:rPr>
+              <a:t>Durchgang </a:t>
+            </a:r>
+            <a:fld id="{F6753D12-211B-4EF5-AA64-00216E01E36B}" type="slidenum">
+              <a:rPr lang="de-DE" sz="1600" smtClean="0">
+                <a:latin typeface="Lato" panose="020F0502020204030203" pitchFamily="34" charset="0"/>
+                <a:ea typeface="Lato" panose="020F0502020204030203" pitchFamily="34" charset="0"/>
+                <a:cs typeface="Lato" panose="020F0502020204030203" pitchFamily="34" charset="0"/>
+              </a:rPr>
+              <a:t>29</a:t>
+            </a:fld>
+            <a:endParaRPr lang="de-DE" sz="1600" dirty="0">
+              <a:latin typeface="Lato" panose="020F0502020204030203" pitchFamily="34" charset="0"/>
+              <a:ea typeface="Lato" panose="020F0502020204030203" pitchFamily="34" charset="0"/>
+              <a:cs typeface="Lato" panose="020F0502020204030203" pitchFamily="34" charset="0"/>
+            </a:endParaRPr>
+          </a:p>
+        </p:txBody>
+      </p:sp>
     </p:spTree>
     <p:extLst>
       <p:ext uri="{BB962C8B-B14F-4D97-AF65-F5344CB8AC3E}">
@@ -7632,6 +9244,58 @@
           </a:prstGeom>
         </p:spPr>
       </p:pic>
+      <p:sp>
+        <p:nvSpPr>
+          <p:cNvPr id="2" name="Textfeld 1">
+            <a:extLst>
+              <a:ext uri="{FF2B5EF4-FFF2-40B4-BE49-F238E27FC236}">
+                <a16:creationId xmlns:a16="http://schemas.microsoft.com/office/drawing/2014/main" id="{BAB68F37-54A3-D930-D3A0-08D615997685}"/>
+              </a:ext>
+            </a:extLst>
+          </p:cNvPr>
+          <p:cNvSpPr txBox="1"/>
+          <p:nvPr/>
+        </p:nvSpPr>
+        <p:spPr>
+          <a:xfrm>
+            <a:off x="0" y="0"/>
+            <a:ext cx="2448272" cy="338554"/>
+          </a:xfrm>
+          <a:prstGeom prst="rect">
+            <a:avLst/>
+          </a:prstGeom>
+          <a:noFill/>
+        </p:spPr>
+        <p:txBody>
+          <a:bodyPr wrap="square" rtlCol="0">
+            <a:spAutoFit/>
+          </a:bodyPr>
+          <a:lstStyle/>
+          <a:p>
+            <a:r>
+              <a:rPr lang="de-DE" sz="1600" dirty="0">
+                <a:latin typeface="Lato" panose="020F0502020204030203" pitchFamily="34" charset="0"/>
+                <a:ea typeface="Lato" panose="020F0502020204030203" pitchFamily="34" charset="0"/>
+                <a:cs typeface="Lato" panose="020F0502020204030203" pitchFamily="34" charset="0"/>
+              </a:rPr>
+              <a:t>Durchgang </a:t>
+            </a:r>
+            <a:fld id="{F6753D12-211B-4EF5-AA64-00216E01E36B}" type="slidenum">
+              <a:rPr lang="de-DE" sz="1600" smtClean="0">
+                <a:latin typeface="Lato" panose="020F0502020204030203" pitchFamily="34" charset="0"/>
+                <a:ea typeface="Lato" panose="020F0502020204030203" pitchFamily="34" charset="0"/>
+                <a:cs typeface="Lato" panose="020F0502020204030203" pitchFamily="34" charset="0"/>
+              </a:rPr>
+              <a:t>3</a:t>
+            </a:fld>
+            <a:endParaRPr lang="de-DE" sz="1600" dirty="0">
+              <a:latin typeface="Lato" panose="020F0502020204030203" pitchFamily="34" charset="0"/>
+              <a:ea typeface="Lato" panose="020F0502020204030203" pitchFamily="34" charset="0"/>
+              <a:cs typeface="Lato" panose="020F0502020204030203" pitchFamily="34" charset="0"/>
+            </a:endParaRPr>
+          </a:p>
+        </p:txBody>
+      </p:sp>
     </p:spTree>
     <p:extLst>
       <p:ext uri="{BB962C8B-B14F-4D97-AF65-F5344CB8AC3E}">
@@ -7695,6 +9359,58 @@
           </a:prstGeom>
         </p:spPr>
       </p:pic>
+      <p:sp>
+        <p:nvSpPr>
+          <p:cNvPr id="2" name="Textfeld 1">
+            <a:extLst>
+              <a:ext uri="{FF2B5EF4-FFF2-40B4-BE49-F238E27FC236}">
+                <a16:creationId xmlns:a16="http://schemas.microsoft.com/office/drawing/2014/main" id="{CD45CE1C-33F4-37C0-39F3-94EF47053498}"/>
+              </a:ext>
+            </a:extLst>
+          </p:cNvPr>
+          <p:cNvSpPr txBox="1"/>
+          <p:nvPr/>
+        </p:nvSpPr>
+        <p:spPr>
+          <a:xfrm>
+            <a:off x="0" y="0"/>
+            <a:ext cx="2448272" cy="338554"/>
+          </a:xfrm>
+          <a:prstGeom prst="rect">
+            <a:avLst/>
+          </a:prstGeom>
+          <a:noFill/>
+        </p:spPr>
+        <p:txBody>
+          <a:bodyPr wrap="square" rtlCol="0">
+            <a:spAutoFit/>
+          </a:bodyPr>
+          <a:lstStyle/>
+          <a:p>
+            <a:r>
+              <a:rPr lang="de-DE" sz="1600" dirty="0">
+                <a:latin typeface="Lato" panose="020F0502020204030203" pitchFamily="34" charset="0"/>
+                <a:ea typeface="Lato" panose="020F0502020204030203" pitchFamily="34" charset="0"/>
+                <a:cs typeface="Lato" panose="020F0502020204030203" pitchFamily="34" charset="0"/>
+              </a:rPr>
+              <a:t>Durchgang </a:t>
+            </a:r>
+            <a:fld id="{F6753D12-211B-4EF5-AA64-00216E01E36B}" type="slidenum">
+              <a:rPr lang="de-DE" sz="1600" smtClean="0">
+                <a:latin typeface="Lato" panose="020F0502020204030203" pitchFamily="34" charset="0"/>
+                <a:ea typeface="Lato" panose="020F0502020204030203" pitchFamily="34" charset="0"/>
+                <a:cs typeface="Lato" panose="020F0502020204030203" pitchFamily="34" charset="0"/>
+              </a:rPr>
+              <a:t>30</a:t>
+            </a:fld>
+            <a:endParaRPr lang="de-DE" sz="1600" dirty="0">
+              <a:latin typeface="Lato" panose="020F0502020204030203" pitchFamily="34" charset="0"/>
+              <a:ea typeface="Lato" panose="020F0502020204030203" pitchFamily="34" charset="0"/>
+              <a:cs typeface="Lato" panose="020F0502020204030203" pitchFamily="34" charset="0"/>
+            </a:endParaRPr>
+          </a:p>
+        </p:txBody>
+      </p:sp>
     </p:spTree>
     <p:extLst>
       <p:ext uri="{BB962C8B-B14F-4D97-AF65-F5344CB8AC3E}">
@@ -7758,6 +9474,58 @@
           </a:prstGeom>
         </p:spPr>
       </p:pic>
+      <p:sp>
+        <p:nvSpPr>
+          <p:cNvPr id="2" name="Textfeld 1">
+            <a:extLst>
+              <a:ext uri="{FF2B5EF4-FFF2-40B4-BE49-F238E27FC236}">
+                <a16:creationId xmlns:a16="http://schemas.microsoft.com/office/drawing/2014/main" id="{6958A1D3-EF84-0361-3352-577BC5FB826A}"/>
+              </a:ext>
+            </a:extLst>
+          </p:cNvPr>
+          <p:cNvSpPr txBox="1"/>
+          <p:nvPr/>
+        </p:nvSpPr>
+        <p:spPr>
+          <a:xfrm>
+            <a:off x="0" y="0"/>
+            <a:ext cx="2448272" cy="338554"/>
+          </a:xfrm>
+          <a:prstGeom prst="rect">
+            <a:avLst/>
+          </a:prstGeom>
+          <a:noFill/>
+        </p:spPr>
+        <p:txBody>
+          <a:bodyPr wrap="square" rtlCol="0">
+            <a:spAutoFit/>
+          </a:bodyPr>
+          <a:lstStyle/>
+          <a:p>
+            <a:r>
+              <a:rPr lang="de-DE" sz="1600" dirty="0">
+                <a:latin typeface="Lato" panose="020F0502020204030203" pitchFamily="34" charset="0"/>
+                <a:ea typeface="Lato" panose="020F0502020204030203" pitchFamily="34" charset="0"/>
+                <a:cs typeface="Lato" panose="020F0502020204030203" pitchFamily="34" charset="0"/>
+              </a:rPr>
+              <a:t>Durchgang </a:t>
+            </a:r>
+            <a:fld id="{F6753D12-211B-4EF5-AA64-00216E01E36B}" type="slidenum">
+              <a:rPr lang="de-DE" sz="1600" smtClean="0">
+                <a:latin typeface="Lato" panose="020F0502020204030203" pitchFamily="34" charset="0"/>
+                <a:ea typeface="Lato" panose="020F0502020204030203" pitchFamily="34" charset="0"/>
+                <a:cs typeface="Lato" panose="020F0502020204030203" pitchFamily="34" charset="0"/>
+              </a:rPr>
+              <a:t>31</a:t>
+            </a:fld>
+            <a:endParaRPr lang="de-DE" sz="1600" dirty="0">
+              <a:latin typeface="Lato" panose="020F0502020204030203" pitchFamily="34" charset="0"/>
+              <a:ea typeface="Lato" panose="020F0502020204030203" pitchFamily="34" charset="0"/>
+              <a:cs typeface="Lato" panose="020F0502020204030203" pitchFamily="34" charset="0"/>
+            </a:endParaRPr>
+          </a:p>
+        </p:txBody>
+      </p:sp>
     </p:spTree>
     <p:extLst>
       <p:ext uri="{BB962C8B-B14F-4D97-AF65-F5344CB8AC3E}">
@@ -7821,6 +9589,58 @@
           </a:prstGeom>
         </p:spPr>
       </p:pic>
+      <p:sp>
+        <p:nvSpPr>
+          <p:cNvPr id="2" name="Textfeld 1">
+            <a:extLst>
+              <a:ext uri="{FF2B5EF4-FFF2-40B4-BE49-F238E27FC236}">
+                <a16:creationId xmlns:a16="http://schemas.microsoft.com/office/drawing/2014/main" id="{27473632-79A0-6D33-909D-B6483F523D57}"/>
+              </a:ext>
+            </a:extLst>
+          </p:cNvPr>
+          <p:cNvSpPr txBox="1"/>
+          <p:nvPr/>
+        </p:nvSpPr>
+        <p:spPr>
+          <a:xfrm>
+            <a:off x="0" y="0"/>
+            <a:ext cx="2448272" cy="338554"/>
+          </a:xfrm>
+          <a:prstGeom prst="rect">
+            <a:avLst/>
+          </a:prstGeom>
+          <a:noFill/>
+        </p:spPr>
+        <p:txBody>
+          <a:bodyPr wrap="square" rtlCol="0">
+            <a:spAutoFit/>
+          </a:bodyPr>
+          <a:lstStyle/>
+          <a:p>
+            <a:r>
+              <a:rPr lang="de-DE" sz="1600" dirty="0">
+                <a:latin typeface="Lato" panose="020F0502020204030203" pitchFamily="34" charset="0"/>
+                <a:ea typeface="Lato" panose="020F0502020204030203" pitchFamily="34" charset="0"/>
+                <a:cs typeface="Lato" panose="020F0502020204030203" pitchFamily="34" charset="0"/>
+              </a:rPr>
+              <a:t>Durchgang </a:t>
+            </a:r>
+            <a:fld id="{F6753D12-211B-4EF5-AA64-00216E01E36B}" type="slidenum">
+              <a:rPr lang="de-DE" sz="1600" smtClean="0">
+                <a:latin typeface="Lato" panose="020F0502020204030203" pitchFamily="34" charset="0"/>
+                <a:ea typeface="Lato" panose="020F0502020204030203" pitchFamily="34" charset="0"/>
+                <a:cs typeface="Lato" panose="020F0502020204030203" pitchFamily="34" charset="0"/>
+              </a:rPr>
+              <a:t>32</a:t>
+            </a:fld>
+            <a:endParaRPr lang="de-DE" sz="1600" dirty="0">
+              <a:latin typeface="Lato" panose="020F0502020204030203" pitchFamily="34" charset="0"/>
+              <a:ea typeface="Lato" panose="020F0502020204030203" pitchFamily="34" charset="0"/>
+              <a:cs typeface="Lato" panose="020F0502020204030203" pitchFamily="34" charset="0"/>
+            </a:endParaRPr>
+          </a:p>
+        </p:txBody>
+      </p:sp>
     </p:spTree>
     <p:extLst>
       <p:ext uri="{BB962C8B-B14F-4D97-AF65-F5344CB8AC3E}">
@@ -7884,6 +9704,58 @@
           </a:prstGeom>
         </p:spPr>
       </p:pic>
+      <p:sp>
+        <p:nvSpPr>
+          <p:cNvPr id="2" name="Textfeld 1">
+            <a:extLst>
+              <a:ext uri="{FF2B5EF4-FFF2-40B4-BE49-F238E27FC236}">
+                <a16:creationId xmlns:a16="http://schemas.microsoft.com/office/drawing/2014/main" id="{C598CB74-96CB-790B-923C-AE55DA82BF2C}"/>
+              </a:ext>
+            </a:extLst>
+          </p:cNvPr>
+          <p:cNvSpPr txBox="1"/>
+          <p:nvPr/>
+        </p:nvSpPr>
+        <p:spPr>
+          <a:xfrm>
+            <a:off x="0" y="0"/>
+            <a:ext cx="2448272" cy="338554"/>
+          </a:xfrm>
+          <a:prstGeom prst="rect">
+            <a:avLst/>
+          </a:prstGeom>
+          <a:noFill/>
+        </p:spPr>
+        <p:txBody>
+          <a:bodyPr wrap="square" rtlCol="0">
+            <a:spAutoFit/>
+          </a:bodyPr>
+          <a:lstStyle/>
+          <a:p>
+            <a:r>
+              <a:rPr lang="de-DE" sz="1600" dirty="0">
+                <a:latin typeface="Lato" panose="020F0502020204030203" pitchFamily="34" charset="0"/>
+                <a:ea typeface="Lato" panose="020F0502020204030203" pitchFamily="34" charset="0"/>
+                <a:cs typeface="Lato" panose="020F0502020204030203" pitchFamily="34" charset="0"/>
+              </a:rPr>
+              <a:t>Durchgang </a:t>
+            </a:r>
+            <a:fld id="{F6753D12-211B-4EF5-AA64-00216E01E36B}" type="slidenum">
+              <a:rPr lang="de-DE" sz="1600" smtClean="0">
+                <a:latin typeface="Lato" panose="020F0502020204030203" pitchFamily="34" charset="0"/>
+                <a:ea typeface="Lato" panose="020F0502020204030203" pitchFamily="34" charset="0"/>
+                <a:cs typeface="Lato" panose="020F0502020204030203" pitchFamily="34" charset="0"/>
+              </a:rPr>
+              <a:t>33</a:t>
+            </a:fld>
+            <a:endParaRPr lang="de-DE" sz="1600" dirty="0">
+              <a:latin typeface="Lato" panose="020F0502020204030203" pitchFamily="34" charset="0"/>
+              <a:ea typeface="Lato" panose="020F0502020204030203" pitchFamily="34" charset="0"/>
+              <a:cs typeface="Lato" panose="020F0502020204030203" pitchFamily="34" charset="0"/>
+            </a:endParaRPr>
+          </a:p>
+        </p:txBody>
+      </p:sp>
     </p:spTree>
     <p:extLst>
       <p:ext uri="{BB962C8B-B14F-4D97-AF65-F5344CB8AC3E}">
@@ -7947,6 +9819,58 @@
           </a:prstGeom>
         </p:spPr>
       </p:pic>
+      <p:sp>
+        <p:nvSpPr>
+          <p:cNvPr id="2" name="Textfeld 1">
+            <a:extLst>
+              <a:ext uri="{FF2B5EF4-FFF2-40B4-BE49-F238E27FC236}">
+                <a16:creationId xmlns:a16="http://schemas.microsoft.com/office/drawing/2014/main" id="{2E027635-8A40-5D27-8BA1-09A489B7C8DE}"/>
+              </a:ext>
+            </a:extLst>
+          </p:cNvPr>
+          <p:cNvSpPr txBox="1"/>
+          <p:nvPr/>
+        </p:nvSpPr>
+        <p:spPr>
+          <a:xfrm>
+            <a:off x="0" y="0"/>
+            <a:ext cx="2448272" cy="338554"/>
+          </a:xfrm>
+          <a:prstGeom prst="rect">
+            <a:avLst/>
+          </a:prstGeom>
+          <a:noFill/>
+        </p:spPr>
+        <p:txBody>
+          <a:bodyPr wrap="square" rtlCol="0">
+            <a:spAutoFit/>
+          </a:bodyPr>
+          <a:lstStyle/>
+          <a:p>
+            <a:r>
+              <a:rPr lang="de-DE" sz="1600" dirty="0">
+                <a:latin typeface="Lato" panose="020F0502020204030203" pitchFamily="34" charset="0"/>
+                <a:ea typeface="Lato" panose="020F0502020204030203" pitchFamily="34" charset="0"/>
+                <a:cs typeface="Lato" panose="020F0502020204030203" pitchFamily="34" charset="0"/>
+              </a:rPr>
+              <a:t>Durchgang </a:t>
+            </a:r>
+            <a:fld id="{F6753D12-211B-4EF5-AA64-00216E01E36B}" type="slidenum">
+              <a:rPr lang="de-DE" sz="1600" smtClean="0">
+                <a:latin typeface="Lato" panose="020F0502020204030203" pitchFamily="34" charset="0"/>
+                <a:ea typeface="Lato" panose="020F0502020204030203" pitchFamily="34" charset="0"/>
+                <a:cs typeface="Lato" panose="020F0502020204030203" pitchFamily="34" charset="0"/>
+              </a:rPr>
+              <a:t>34</a:t>
+            </a:fld>
+            <a:endParaRPr lang="de-DE" sz="1600" dirty="0">
+              <a:latin typeface="Lato" panose="020F0502020204030203" pitchFamily="34" charset="0"/>
+              <a:ea typeface="Lato" panose="020F0502020204030203" pitchFamily="34" charset="0"/>
+              <a:cs typeface="Lato" panose="020F0502020204030203" pitchFamily="34" charset="0"/>
+            </a:endParaRPr>
+          </a:p>
+        </p:txBody>
+      </p:sp>
     </p:spTree>
     <p:extLst>
       <p:ext uri="{BB962C8B-B14F-4D97-AF65-F5344CB8AC3E}">
@@ -8010,6 +9934,58 @@
           </a:prstGeom>
         </p:spPr>
       </p:pic>
+      <p:sp>
+        <p:nvSpPr>
+          <p:cNvPr id="2" name="Textfeld 1">
+            <a:extLst>
+              <a:ext uri="{FF2B5EF4-FFF2-40B4-BE49-F238E27FC236}">
+                <a16:creationId xmlns:a16="http://schemas.microsoft.com/office/drawing/2014/main" id="{E64E2035-CC71-BAD5-6632-CBF885D46989}"/>
+              </a:ext>
+            </a:extLst>
+          </p:cNvPr>
+          <p:cNvSpPr txBox="1"/>
+          <p:nvPr/>
+        </p:nvSpPr>
+        <p:spPr>
+          <a:xfrm>
+            <a:off x="0" y="0"/>
+            <a:ext cx="2448272" cy="338554"/>
+          </a:xfrm>
+          <a:prstGeom prst="rect">
+            <a:avLst/>
+          </a:prstGeom>
+          <a:noFill/>
+        </p:spPr>
+        <p:txBody>
+          <a:bodyPr wrap="square" rtlCol="0">
+            <a:spAutoFit/>
+          </a:bodyPr>
+          <a:lstStyle/>
+          <a:p>
+            <a:r>
+              <a:rPr lang="de-DE" sz="1600" dirty="0">
+                <a:latin typeface="Lato" panose="020F0502020204030203" pitchFamily="34" charset="0"/>
+                <a:ea typeface="Lato" panose="020F0502020204030203" pitchFamily="34" charset="0"/>
+                <a:cs typeface="Lato" panose="020F0502020204030203" pitchFamily="34" charset="0"/>
+              </a:rPr>
+              <a:t>Durchgang </a:t>
+            </a:r>
+            <a:fld id="{F6753D12-211B-4EF5-AA64-00216E01E36B}" type="slidenum">
+              <a:rPr lang="de-DE" sz="1600" smtClean="0">
+                <a:latin typeface="Lato" panose="020F0502020204030203" pitchFamily="34" charset="0"/>
+                <a:ea typeface="Lato" panose="020F0502020204030203" pitchFamily="34" charset="0"/>
+                <a:cs typeface="Lato" panose="020F0502020204030203" pitchFamily="34" charset="0"/>
+              </a:rPr>
+              <a:t>4</a:t>
+            </a:fld>
+            <a:endParaRPr lang="de-DE" sz="1600" dirty="0">
+              <a:latin typeface="Lato" panose="020F0502020204030203" pitchFamily="34" charset="0"/>
+              <a:ea typeface="Lato" panose="020F0502020204030203" pitchFamily="34" charset="0"/>
+              <a:cs typeface="Lato" panose="020F0502020204030203" pitchFamily="34" charset="0"/>
+            </a:endParaRPr>
+          </a:p>
+        </p:txBody>
+      </p:sp>
     </p:spTree>
     <p:extLst>
       <p:ext uri="{BB962C8B-B14F-4D97-AF65-F5344CB8AC3E}">
@@ -8073,6 +10049,58 @@
           </a:prstGeom>
         </p:spPr>
       </p:pic>
+      <p:sp>
+        <p:nvSpPr>
+          <p:cNvPr id="2" name="Textfeld 1">
+            <a:extLst>
+              <a:ext uri="{FF2B5EF4-FFF2-40B4-BE49-F238E27FC236}">
+                <a16:creationId xmlns:a16="http://schemas.microsoft.com/office/drawing/2014/main" id="{BE035081-F671-4527-DE48-B4CAF486FA88}"/>
+              </a:ext>
+            </a:extLst>
+          </p:cNvPr>
+          <p:cNvSpPr txBox="1"/>
+          <p:nvPr/>
+        </p:nvSpPr>
+        <p:spPr>
+          <a:xfrm>
+            <a:off x="0" y="0"/>
+            <a:ext cx="2448272" cy="338554"/>
+          </a:xfrm>
+          <a:prstGeom prst="rect">
+            <a:avLst/>
+          </a:prstGeom>
+          <a:noFill/>
+        </p:spPr>
+        <p:txBody>
+          <a:bodyPr wrap="square" rtlCol="0">
+            <a:spAutoFit/>
+          </a:bodyPr>
+          <a:lstStyle/>
+          <a:p>
+            <a:r>
+              <a:rPr lang="de-DE" sz="1600" dirty="0">
+                <a:latin typeface="Lato" panose="020F0502020204030203" pitchFamily="34" charset="0"/>
+                <a:ea typeface="Lato" panose="020F0502020204030203" pitchFamily="34" charset="0"/>
+                <a:cs typeface="Lato" panose="020F0502020204030203" pitchFamily="34" charset="0"/>
+              </a:rPr>
+              <a:t>Durchgang </a:t>
+            </a:r>
+            <a:fld id="{F6753D12-211B-4EF5-AA64-00216E01E36B}" type="slidenum">
+              <a:rPr lang="de-DE" sz="1600" smtClean="0">
+                <a:latin typeface="Lato" panose="020F0502020204030203" pitchFamily="34" charset="0"/>
+                <a:ea typeface="Lato" panose="020F0502020204030203" pitchFamily="34" charset="0"/>
+                <a:cs typeface="Lato" panose="020F0502020204030203" pitchFamily="34" charset="0"/>
+              </a:rPr>
+              <a:t>5</a:t>
+            </a:fld>
+            <a:endParaRPr lang="de-DE" sz="1600" dirty="0">
+              <a:latin typeface="Lato" panose="020F0502020204030203" pitchFamily="34" charset="0"/>
+              <a:ea typeface="Lato" panose="020F0502020204030203" pitchFamily="34" charset="0"/>
+              <a:cs typeface="Lato" panose="020F0502020204030203" pitchFamily="34" charset="0"/>
+            </a:endParaRPr>
+          </a:p>
+        </p:txBody>
+      </p:sp>
     </p:spTree>
     <p:extLst>
       <p:ext uri="{BB962C8B-B14F-4D97-AF65-F5344CB8AC3E}">
@@ -8136,6 +10164,58 @@
           </a:prstGeom>
         </p:spPr>
       </p:pic>
+      <p:sp>
+        <p:nvSpPr>
+          <p:cNvPr id="2" name="Textfeld 1">
+            <a:extLst>
+              <a:ext uri="{FF2B5EF4-FFF2-40B4-BE49-F238E27FC236}">
+                <a16:creationId xmlns:a16="http://schemas.microsoft.com/office/drawing/2014/main" id="{138C6C8D-8161-BCE3-C106-E6CB7C399484}"/>
+              </a:ext>
+            </a:extLst>
+          </p:cNvPr>
+          <p:cNvSpPr txBox="1"/>
+          <p:nvPr/>
+        </p:nvSpPr>
+        <p:spPr>
+          <a:xfrm>
+            <a:off x="0" y="0"/>
+            <a:ext cx="2448272" cy="338554"/>
+          </a:xfrm>
+          <a:prstGeom prst="rect">
+            <a:avLst/>
+          </a:prstGeom>
+          <a:noFill/>
+        </p:spPr>
+        <p:txBody>
+          <a:bodyPr wrap="square" rtlCol="0">
+            <a:spAutoFit/>
+          </a:bodyPr>
+          <a:lstStyle/>
+          <a:p>
+            <a:r>
+              <a:rPr lang="de-DE" sz="1600" dirty="0">
+                <a:latin typeface="Lato" panose="020F0502020204030203" pitchFamily="34" charset="0"/>
+                <a:ea typeface="Lato" panose="020F0502020204030203" pitchFamily="34" charset="0"/>
+                <a:cs typeface="Lato" panose="020F0502020204030203" pitchFamily="34" charset="0"/>
+              </a:rPr>
+              <a:t>Durchgang </a:t>
+            </a:r>
+            <a:fld id="{F6753D12-211B-4EF5-AA64-00216E01E36B}" type="slidenum">
+              <a:rPr lang="de-DE" sz="1600" smtClean="0">
+                <a:latin typeface="Lato" panose="020F0502020204030203" pitchFamily="34" charset="0"/>
+                <a:ea typeface="Lato" panose="020F0502020204030203" pitchFamily="34" charset="0"/>
+                <a:cs typeface="Lato" panose="020F0502020204030203" pitchFamily="34" charset="0"/>
+              </a:rPr>
+              <a:t>6</a:t>
+            </a:fld>
+            <a:endParaRPr lang="de-DE" sz="1600" dirty="0">
+              <a:latin typeface="Lato" panose="020F0502020204030203" pitchFamily="34" charset="0"/>
+              <a:ea typeface="Lato" panose="020F0502020204030203" pitchFamily="34" charset="0"/>
+              <a:cs typeface="Lato" panose="020F0502020204030203" pitchFamily="34" charset="0"/>
+            </a:endParaRPr>
+          </a:p>
+        </p:txBody>
+      </p:sp>
     </p:spTree>
     <p:extLst>
       <p:ext uri="{BB962C8B-B14F-4D97-AF65-F5344CB8AC3E}">
@@ -8199,6 +10279,58 @@
           </a:prstGeom>
         </p:spPr>
       </p:pic>
+      <p:sp>
+        <p:nvSpPr>
+          <p:cNvPr id="2" name="Textfeld 1">
+            <a:extLst>
+              <a:ext uri="{FF2B5EF4-FFF2-40B4-BE49-F238E27FC236}">
+                <a16:creationId xmlns:a16="http://schemas.microsoft.com/office/drawing/2014/main" id="{564E2ADB-0798-587F-2EC5-B407DC75B35A}"/>
+              </a:ext>
+            </a:extLst>
+          </p:cNvPr>
+          <p:cNvSpPr txBox="1"/>
+          <p:nvPr/>
+        </p:nvSpPr>
+        <p:spPr>
+          <a:xfrm>
+            <a:off x="0" y="0"/>
+            <a:ext cx="2448272" cy="338554"/>
+          </a:xfrm>
+          <a:prstGeom prst="rect">
+            <a:avLst/>
+          </a:prstGeom>
+          <a:noFill/>
+        </p:spPr>
+        <p:txBody>
+          <a:bodyPr wrap="square" rtlCol="0">
+            <a:spAutoFit/>
+          </a:bodyPr>
+          <a:lstStyle/>
+          <a:p>
+            <a:r>
+              <a:rPr lang="de-DE" sz="1600" dirty="0">
+                <a:latin typeface="Lato" panose="020F0502020204030203" pitchFamily="34" charset="0"/>
+                <a:ea typeface="Lato" panose="020F0502020204030203" pitchFamily="34" charset="0"/>
+                <a:cs typeface="Lato" panose="020F0502020204030203" pitchFamily="34" charset="0"/>
+              </a:rPr>
+              <a:t>Durchgang </a:t>
+            </a:r>
+            <a:fld id="{F6753D12-211B-4EF5-AA64-00216E01E36B}" type="slidenum">
+              <a:rPr lang="de-DE" sz="1600" smtClean="0">
+                <a:latin typeface="Lato" panose="020F0502020204030203" pitchFamily="34" charset="0"/>
+                <a:ea typeface="Lato" panose="020F0502020204030203" pitchFamily="34" charset="0"/>
+                <a:cs typeface="Lato" panose="020F0502020204030203" pitchFamily="34" charset="0"/>
+              </a:rPr>
+              <a:t>7</a:t>
+            </a:fld>
+            <a:endParaRPr lang="de-DE" sz="1600" dirty="0">
+              <a:latin typeface="Lato" panose="020F0502020204030203" pitchFamily="34" charset="0"/>
+              <a:ea typeface="Lato" panose="020F0502020204030203" pitchFamily="34" charset="0"/>
+              <a:cs typeface="Lato" panose="020F0502020204030203" pitchFamily="34" charset="0"/>
+            </a:endParaRPr>
+          </a:p>
+        </p:txBody>
+      </p:sp>
     </p:spTree>
     <p:extLst>
       <p:ext uri="{BB962C8B-B14F-4D97-AF65-F5344CB8AC3E}">
@@ -8262,6 +10394,58 @@
           </a:prstGeom>
         </p:spPr>
       </p:pic>
+      <p:sp>
+        <p:nvSpPr>
+          <p:cNvPr id="2" name="Textfeld 1">
+            <a:extLst>
+              <a:ext uri="{FF2B5EF4-FFF2-40B4-BE49-F238E27FC236}">
+                <a16:creationId xmlns:a16="http://schemas.microsoft.com/office/drawing/2014/main" id="{13637DB8-8FC1-7341-2205-C79414953FB2}"/>
+              </a:ext>
+            </a:extLst>
+          </p:cNvPr>
+          <p:cNvSpPr txBox="1"/>
+          <p:nvPr/>
+        </p:nvSpPr>
+        <p:spPr>
+          <a:xfrm>
+            <a:off x="0" y="0"/>
+            <a:ext cx="2448272" cy="338554"/>
+          </a:xfrm>
+          <a:prstGeom prst="rect">
+            <a:avLst/>
+          </a:prstGeom>
+          <a:noFill/>
+        </p:spPr>
+        <p:txBody>
+          <a:bodyPr wrap="square" rtlCol="0">
+            <a:spAutoFit/>
+          </a:bodyPr>
+          <a:lstStyle/>
+          <a:p>
+            <a:r>
+              <a:rPr lang="de-DE" sz="1600" dirty="0">
+                <a:latin typeface="Lato" panose="020F0502020204030203" pitchFamily="34" charset="0"/>
+                <a:ea typeface="Lato" panose="020F0502020204030203" pitchFamily="34" charset="0"/>
+                <a:cs typeface="Lato" panose="020F0502020204030203" pitchFamily="34" charset="0"/>
+              </a:rPr>
+              <a:t>Durchgang </a:t>
+            </a:r>
+            <a:fld id="{F6753D12-211B-4EF5-AA64-00216E01E36B}" type="slidenum">
+              <a:rPr lang="de-DE" sz="1600" smtClean="0">
+                <a:latin typeface="Lato" panose="020F0502020204030203" pitchFamily="34" charset="0"/>
+                <a:ea typeface="Lato" panose="020F0502020204030203" pitchFamily="34" charset="0"/>
+                <a:cs typeface="Lato" panose="020F0502020204030203" pitchFamily="34" charset="0"/>
+              </a:rPr>
+              <a:t>8</a:t>
+            </a:fld>
+            <a:endParaRPr lang="de-DE" sz="1600" dirty="0">
+              <a:latin typeface="Lato" panose="020F0502020204030203" pitchFamily="34" charset="0"/>
+              <a:ea typeface="Lato" panose="020F0502020204030203" pitchFamily="34" charset="0"/>
+              <a:cs typeface="Lato" panose="020F0502020204030203" pitchFamily="34" charset="0"/>
+            </a:endParaRPr>
+          </a:p>
+        </p:txBody>
+      </p:sp>
     </p:spTree>
     <p:extLst>
       <p:ext uri="{BB962C8B-B14F-4D97-AF65-F5344CB8AC3E}">
@@ -8325,6 +10509,58 @@
           </a:prstGeom>
         </p:spPr>
       </p:pic>
+      <p:sp>
+        <p:nvSpPr>
+          <p:cNvPr id="2" name="Textfeld 1">
+            <a:extLst>
+              <a:ext uri="{FF2B5EF4-FFF2-40B4-BE49-F238E27FC236}">
+                <a16:creationId xmlns:a16="http://schemas.microsoft.com/office/drawing/2014/main" id="{273FFB7E-EC4D-3C6B-BACA-15F29756A734}"/>
+              </a:ext>
+            </a:extLst>
+          </p:cNvPr>
+          <p:cNvSpPr txBox="1"/>
+          <p:nvPr/>
+        </p:nvSpPr>
+        <p:spPr>
+          <a:xfrm>
+            <a:off x="0" y="0"/>
+            <a:ext cx="2448272" cy="338554"/>
+          </a:xfrm>
+          <a:prstGeom prst="rect">
+            <a:avLst/>
+          </a:prstGeom>
+          <a:noFill/>
+        </p:spPr>
+        <p:txBody>
+          <a:bodyPr wrap="square" rtlCol="0">
+            <a:spAutoFit/>
+          </a:bodyPr>
+          <a:lstStyle/>
+          <a:p>
+            <a:r>
+              <a:rPr lang="de-DE" sz="1600" dirty="0">
+                <a:latin typeface="Lato" panose="020F0502020204030203" pitchFamily="34" charset="0"/>
+                <a:ea typeface="Lato" panose="020F0502020204030203" pitchFamily="34" charset="0"/>
+                <a:cs typeface="Lato" panose="020F0502020204030203" pitchFamily="34" charset="0"/>
+              </a:rPr>
+              <a:t>Durchgang </a:t>
+            </a:r>
+            <a:fld id="{F6753D12-211B-4EF5-AA64-00216E01E36B}" type="slidenum">
+              <a:rPr lang="de-DE" sz="1600" smtClean="0">
+                <a:latin typeface="Lato" panose="020F0502020204030203" pitchFamily="34" charset="0"/>
+                <a:ea typeface="Lato" panose="020F0502020204030203" pitchFamily="34" charset="0"/>
+                <a:cs typeface="Lato" panose="020F0502020204030203" pitchFamily="34" charset="0"/>
+              </a:rPr>
+              <a:t>9</a:t>
+            </a:fld>
+            <a:endParaRPr lang="de-DE" sz="1600" dirty="0">
+              <a:latin typeface="Lato" panose="020F0502020204030203" pitchFamily="34" charset="0"/>
+              <a:ea typeface="Lato" panose="020F0502020204030203" pitchFamily="34" charset="0"/>
+              <a:cs typeface="Lato" panose="020F0502020204030203" pitchFamily="34" charset="0"/>
+            </a:endParaRPr>
+          </a:p>
+        </p:txBody>
+      </p:sp>
     </p:spTree>
     <p:extLst>
       <p:ext uri="{BB962C8B-B14F-4D97-AF65-F5344CB8AC3E}">
